--- a/decks/Trans_01_ABO-Rh-Antibody-Screen-Compatibility.pptx
+++ b/decks/Trans_01_ABO-Rh-Antibody-Screen-Compatibility.pptx
@@ -36,9 +36,13 @@
     <p:sldId id="284" r:id="rId30"/>
     <p:sldId id="285" r:id="rId31"/>
     <p:sldId id="286" r:id="rId32"/>
+    <p:sldId id="295" r:id="rId46"/>
     <p:sldId id="287" r:id="rId33"/>
+    <p:sldId id="294" r:id="rId45"/>
     <p:sldId id="288" r:id="rId34"/>
+    <p:sldId id="293" r:id="rId44"/>
     <p:sldId id="289" r:id="rId35"/>
+    <p:sldId id="292" r:id="rId43"/>
     <p:sldId id="290" r:id="rId36"/>
     <p:sldId id="291" r:id="rId37"/>
   </p:sldIdLst>
@@ -4011,6 +4015,10 @@
           </a:solidFill>
           <a:ln/>
         </p:spPr>
+        <p:txBody>
+          <a:bodyPr/>
+          <a:p/>
+        </p:txBody>
       </p:sp>
       <p:sp>
         <p:nvSpPr>
@@ -4033,6 +4041,10 @@
           </a:solidFill>
           <a:ln/>
         </p:spPr>
+        <p:txBody>
+          <a:bodyPr/>
+          <a:p/>
+        </p:txBody>
       </p:sp>
       <p:sp>
         <p:nvSpPr>
@@ -4055,6 +4067,10 @@
           </a:solidFill>
           <a:ln/>
         </p:spPr>
+        <p:txBody>
+          <a:bodyPr/>
+          <a:p/>
+        </p:txBody>
       </p:sp>
       <p:sp>
         <p:nvSpPr>
@@ -4077,6 +4093,10 @@
           </a:solidFill>
           <a:ln/>
         </p:spPr>
+        <p:txBody>
+          <a:bodyPr/>
+          <a:p/>
+        </p:txBody>
       </p:sp>
       <p:sp>
         <p:nvSpPr>
@@ -4498,6 +4518,10 @@
             </a:outerShdw>
           </a:effectLst>
         </p:spPr>
+        <p:txBody>
+          <a:bodyPr/>
+          <a:p/>
+        </p:txBody>
       </p:sp>
       <p:pic>
         <p:nvPicPr>
@@ -4954,6 +4978,10 @@
             </a:outerShdw>
           </a:effectLst>
         </p:spPr>
+        <p:txBody>
+          <a:bodyPr/>
+          <a:p/>
+        </p:txBody>
       </p:sp>
       <p:sp>
         <p:nvSpPr>
@@ -5128,6 +5156,10 @@
             </a:outerShdw>
           </a:effectLst>
         </p:spPr>
+        <p:txBody>
+          <a:bodyPr/>
+          <a:p/>
+        </p:txBody>
       </p:sp>
       <p:sp>
         <p:nvSpPr>
@@ -5433,6 +5465,10 @@
           </a:solidFill>
           <a:ln/>
         </p:spPr>
+        <p:txBody>
+          <a:bodyPr/>
+          <a:p/>
+        </p:txBody>
       </p:sp>
       <p:sp>
         <p:nvSpPr>
@@ -5455,6 +5491,10 @@
           </a:solidFill>
           <a:ln/>
         </p:spPr>
+        <p:txBody>
+          <a:bodyPr/>
+          <a:p/>
+        </p:txBody>
       </p:sp>
       <p:sp>
         <p:nvSpPr>
@@ -5716,6 +5756,10 @@
             </a:outerShdw>
           </a:effectLst>
         </p:spPr>
+        <p:txBody>
+          <a:bodyPr/>
+          <a:p/>
+        </p:txBody>
       </p:sp>
       <p:sp>
         <p:nvSpPr>
@@ -5796,6 +5840,10 @@
             <a:tailEnd type="triangle"/>
           </a:ln>
         </p:spPr>
+        <p:txBody>
+          <a:bodyPr/>
+          <a:p/>
+        </p:txBody>
       </p:sp>
       <p:sp>
         <p:nvSpPr>
@@ -5830,6 +5878,10 @@
             </a:outerShdw>
           </a:effectLst>
         </p:spPr>
+        <p:txBody>
+          <a:bodyPr/>
+          <a:p/>
+        </p:txBody>
       </p:sp>
       <p:sp>
         <p:nvSpPr>
@@ -5910,6 +5962,10 @@
             <a:tailEnd type="triangle"/>
           </a:ln>
         </p:spPr>
+        <p:txBody>
+          <a:bodyPr/>
+          <a:p/>
+        </p:txBody>
       </p:sp>
       <p:sp>
         <p:nvSpPr>
@@ -5944,6 +6000,10 @@
             </a:outerShdw>
           </a:effectLst>
         </p:spPr>
+        <p:txBody>
+          <a:bodyPr/>
+          <a:p/>
+        </p:txBody>
       </p:sp>
       <p:sp>
         <p:nvSpPr>
@@ -6024,6 +6084,10 @@
             <a:tailEnd type="triangle"/>
           </a:ln>
         </p:spPr>
+        <p:txBody>
+          <a:bodyPr/>
+          <a:p/>
+        </p:txBody>
       </p:sp>
       <p:sp>
         <p:nvSpPr>
@@ -6058,6 +6122,10 @@
             </a:outerShdw>
           </a:effectLst>
         </p:spPr>
+        <p:txBody>
+          <a:bodyPr/>
+          <a:p/>
+        </p:txBody>
       </p:sp>
       <p:sp>
         <p:nvSpPr>
@@ -6143,6 +6211,10 @@
             </a:outerShdw>
           </a:effectLst>
         </p:spPr>
+        <p:txBody>
+          <a:bodyPr/>
+          <a:p/>
+        </p:txBody>
       </p:sp>
       <p:sp>
         <p:nvSpPr>
@@ -6516,6 +6588,10 @@
             </a:outerShdw>
           </a:effectLst>
         </p:spPr>
+        <p:txBody>
+          <a:bodyPr/>
+          <a:p/>
+        </p:txBody>
       </p:sp>
       <p:pic>
         <p:nvPicPr>
@@ -6824,6 +6900,10 @@
             </a:outerShdw>
           </a:effectLst>
         </p:spPr>
+        <p:txBody>
+          <a:bodyPr/>
+          <a:p/>
+        </p:txBody>
       </p:sp>
       <p:sp>
         <p:nvSpPr>
@@ -6998,6 +7078,10 @@
             </a:outerShdw>
           </a:effectLst>
         </p:spPr>
+        <p:txBody>
+          <a:bodyPr/>
+          <a:p/>
+        </p:txBody>
       </p:sp>
       <p:sp>
         <p:nvSpPr>
@@ -7303,6 +7387,10 @@
           </a:solidFill>
           <a:ln/>
         </p:spPr>
+        <p:txBody>
+          <a:bodyPr/>
+          <a:p/>
+        </p:txBody>
       </p:sp>
       <p:sp>
         <p:nvSpPr>
@@ -7325,6 +7413,10 @@
           </a:solidFill>
           <a:ln/>
         </p:spPr>
+        <p:txBody>
+          <a:bodyPr/>
+          <a:p/>
+        </p:txBody>
       </p:sp>
       <p:sp>
         <p:nvSpPr>
@@ -8691,6 +8783,10 @@
             </a:outerShdw>
           </a:effectLst>
         </p:spPr>
+        <p:txBody>
+          <a:bodyPr/>
+          <a:p/>
+        </p:txBody>
       </p:sp>
       <p:sp>
         <p:nvSpPr>
@@ -8865,6 +8961,10 @@
             </a:outerShdw>
           </a:effectLst>
         </p:spPr>
+        <p:txBody>
+          <a:bodyPr/>
+          <a:p/>
+        </p:txBody>
       </p:sp>
       <p:sp>
         <p:nvSpPr>
@@ -10571,6 +10671,10 @@
             </a:outerShdw>
           </a:effectLst>
         </p:spPr>
+        <p:txBody>
+          <a:bodyPr/>
+          <a:p/>
+        </p:txBody>
       </p:sp>
       <p:sp>
         <p:nvSpPr>
@@ -10678,6 +10782,10 @@
             </a:outerShdw>
           </a:effectLst>
         </p:spPr>
+        <p:txBody>
+          <a:bodyPr/>
+          <a:p/>
+        </p:txBody>
       </p:sp>
       <p:sp>
         <p:nvSpPr>
@@ -10785,6 +10893,10 @@
             </a:outerShdw>
           </a:effectLst>
         </p:spPr>
+        <p:txBody>
+          <a:bodyPr/>
+          <a:p/>
+        </p:txBody>
       </p:sp>
       <p:sp>
         <p:nvSpPr>
@@ -10892,6 +11004,10 @@
             </a:outerShdw>
           </a:effectLst>
         </p:spPr>
+        <p:txBody>
+          <a:bodyPr/>
+          <a:p/>
+        </p:txBody>
       </p:sp>
       <p:sp>
         <p:nvSpPr>
@@ -11137,6 +11253,10 @@
           </a:solidFill>
           <a:ln/>
         </p:spPr>
+        <p:txBody>
+          <a:bodyPr/>
+          <a:p/>
+        </p:txBody>
       </p:sp>
       <p:sp>
         <p:nvSpPr>
@@ -11159,6 +11279,10 @@
           </a:solidFill>
           <a:ln/>
         </p:spPr>
+        <p:txBody>
+          <a:bodyPr/>
+          <a:p/>
+        </p:txBody>
       </p:sp>
       <p:sp>
         <p:nvSpPr>
@@ -11415,6 +11539,10 @@
             </a:outerShdw>
           </a:effectLst>
         </p:spPr>
+        <p:txBody>
+          <a:bodyPr/>
+          <a:p/>
+        </p:txBody>
       </p:sp>
       <p:sp>
         <p:nvSpPr>
@@ -11589,6 +11717,10 @@
             </a:outerShdw>
           </a:effectLst>
         </p:spPr>
+        <p:txBody>
+          <a:bodyPr/>
+          <a:p/>
+        </p:txBody>
       </p:sp>
       <p:sp>
         <p:nvSpPr>
@@ -11979,6 +12111,10 @@
             </a:outerShdw>
           </a:effectLst>
         </p:spPr>
+        <p:txBody>
+          <a:bodyPr/>
+          <a:p/>
+        </p:txBody>
       </p:sp>
       <p:sp>
         <p:nvSpPr>
@@ -12153,6 +12289,10 @@
             </a:outerShdw>
           </a:effectLst>
         </p:spPr>
+        <p:txBody>
+          <a:bodyPr/>
+          <a:p/>
+        </p:txBody>
       </p:sp>
       <p:sp>
         <p:nvSpPr>
@@ -12458,6 +12598,10 @@
           </a:solidFill>
           <a:ln/>
         </p:spPr>
+        <p:txBody>
+          <a:bodyPr/>
+          <a:p/>
+        </p:txBody>
       </p:sp>
       <p:sp>
         <p:nvSpPr>
@@ -12480,6 +12624,10 @@
           </a:solidFill>
           <a:ln/>
         </p:spPr>
+        <p:txBody>
+          <a:bodyPr/>
+          <a:p/>
+        </p:txBody>
       </p:sp>
       <p:sp>
         <p:nvSpPr>
@@ -12736,6 +12884,10 @@
             </a:outerShdw>
           </a:effectLst>
         </p:spPr>
+        <p:txBody>
+          <a:bodyPr/>
+          <a:p/>
+        </p:txBody>
       </p:sp>
       <p:sp>
         <p:nvSpPr>
@@ -12846,6 +12998,10 @@
             </a:outerShdw>
           </a:effectLst>
         </p:spPr>
+        <p:txBody>
+          <a:bodyPr/>
+          <a:p/>
+        </p:txBody>
       </p:sp>
       <p:sp>
         <p:nvSpPr>
@@ -13275,6 +13431,10 @@
             </a:outerShdw>
           </a:effectLst>
         </p:spPr>
+        <p:txBody>
+          <a:bodyPr/>
+          <a:p/>
+        </p:txBody>
       </p:sp>
       <p:sp>
         <p:nvSpPr>
@@ -13601,6 +13761,10 @@
             </a:outerShdw>
           </a:effectLst>
         </p:spPr>
+        <p:txBody>
+          <a:bodyPr/>
+          <a:p/>
+        </p:txBody>
       </p:sp>
       <p:sp>
         <p:nvSpPr>
@@ -13711,6 +13875,10 @@
             </a:outerShdw>
           </a:effectLst>
         </p:spPr>
+        <p:txBody>
+          <a:bodyPr/>
+          <a:p/>
+        </p:txBody>
       </p:sp>
       <p:sp>
         <p:nvSpPr>
@@ -14140,6 +14308,10 @@
             </a:outerShdw>
           </a:effectLst>
         </p:spPr>
+        <p:txBody>
+          <a:bodyPr/>
+          <a:p/>
+        </p:txBody>
       </p:sp>
       <p:sp>
         <p:nvSpPr>
@@ -14466,6 +14638,10 @@
             </a:outerShdw>
           </a:effectLst>
         </p:spPr>
+        <p:txBody>
+          <a:bodyPr/>
+          <a:p/>
+        </p:txBody>
       </p:sp>
       <p:sp>
         <p:nvSpPr>
@@ -14576,6 +14752,10 @@
             </a:outerShdw>
           </a:effectLst>
         </p:spPr>
+        <p:txBody>
+          <a:bodyPr/>
+          <a:p/>
+        </p:txBody>
       </p:sp>
       <p:sp>
         <p:nvSpPr>
@@ -15005,6 +15185,10 @@
             </a:outerShdw>
           </a:effectLst>
         </p:spPr>
+        <p:txBody>
+          <a:bodyPr/>
+          <a:p/>
+        </p:txBody>
       </p:sp>
       <p:sp>
         <p:nvSpPr>
@@ -15331,6 +15515,10 @@
             </a:outerShdw>
           </a:effectLst>
         </p:spPr>
+        <p:txBody>
+          <a:bodyPr/>
+          <a:p/>
+        </p:txBody>
       </p:sp>
       <p:sp>
         <p:nvSpPr>
@@ -15358,6 +15546,10 @@
             </a:outerShdw>
           </a:effectLst>
         </p:spPr>
+        <p:txBody>
+          <a:bodyPr/>
+          <a:p/>
+        </p:txBody>
       </p:sp>
       <p:sp>
         <p:nvSpPr>
@@ -15465,6 +15657,10 @@
             </a:outerShdw>
           </a:effectLst>
         </p:spPr>
+        <p:txBody>
+          <a:bodyPr/>
+          <a:p/>
+        </p:txBody>
       </p:sp>
       <p:sp>
         <p:nvSpPr>
@@ -15492,6 +15688,10 @@
             </a:outerShdw>
           </a:effectLst>
         </p:spPr>
+        <p:txBody>
+          <a:bodyPr/>
+          <a:p/>
+        </p:txBody>
       </p:sp>
       <p:sp>
         <p:nvSpPr>
@@ -15599,6 +15799,10 @@
             </a:outerShdw>
           </a:effectLst>
         </p:spPr>
+        <p:txBody>
+          <a:bodyPr/>
+          <a:p/>
+        </p:txBody>
       </p:sp>
       <p:sp>
         <p:nvSpPr>
@@ -15626,6 +15830,10 @@
             </a:outerShdw>
           </a:effectLst>
         </p:spPr>
+        <p:txBody>
+          <a:bodyPr/>
+          <a:p/>
+        </p:txBody>
       </p:sp>
       <p:sp>
         <p:nvSpPr>
@@ -15733,6 +15941,10 @@
             </a:outerShdw>
           </a:effectLst>
         </p:spPr>
+        <p:txBody>
+          <a:bodyPr/>
+          <a:p/>
+        </p:txBody>
       </p:sp>
       <p:sp>
         <p:nvSpPr>
@@ -15760,6 +15972,10 @@
             </a:outerShdw>
           </a:effectLst>
         </p:spPr>
+        <p:txBody>
+          <a:bodyPr/>
+          <a:p/>
+        </p:txBody>
       </p:sp>
       <p:sp>
         <p:nvSpPr>
@@ -15867,6 +16083,10 @@
             </a:outerShdw>
           </a:effectLst>
         </p:spPr>
+        <p:txBody>
+          <a:bodyPr/>
+          <a:p/>
+        </p:txBody>
       </p:sp>
       <p:sp>
         <p:nvSpPr>
@@ -15894,6 +16114,10 @@
             </a:outerShdw>
           </a:effectLst>
         </p:spPr>
+        <p:txBody>
+          <a:bodyPr/>
+          <a:p/>
+        </p:txBody>
       </p:sp>
       <p:sp>
         <p:nvSpPr>
@@ -16001,6 +16225,10 @@
             </a:outerShdw>
           </a:effectLst>
         </p:spPr>
+        <p:txBody>
+          <a:bodyPr/>
+          <a:p/>
+        </p:txBody>
       </p:sp>
       <p:sp>
         <p:nvSpPr>
@@ -16028,6 +16256,10 @@
             </a:outerShdw>
           </a:effectLst>
         </p:spPr>
+        <p:txBody>
+          <a:bodyPr/>
+          <a:p/>
+        </p:txBody>
       </p:sp>
       <p:sp>
         <p:nvSpPr>
@@ -16266,6 +16498,10 @@
           </a:solidFill>
           <a:ln/>
         </p:spPr>
+        <p:txBody>
+          <a:bodyPr/>
+          <a:p/>
+        </p:txBody>
       </p:sp>
       <p:sp>
         <p:nvSpPr>
@@ -16288,6 +16524,10 @@
           </a:solidFill>
           <a:ln/>
         </p:spPr>
+        <p:txBody>
+          <a:bodyPr/>
+          <a:p/>
+        </p:txBody>
       </p:sp>
       <p:sp>
         <p:nvSpPr>
@@ -16606,9 +16846,9 @@
               <a:buNone/>
             </a:pPr>
             <a:r>
-              <a:rPr lang="en-US" sz="1350" b="1" dirty="0">
-                <a:solidFill>
-                  <a:srgbClr val="7A0E3C"/>
+              <a:rPr lang="en-US" sz="1350" b="0" dirty="0">
+                <a:solidFill>
+                  <a:srgbClr val="33444F"/>
                 </a:solidFill>
                 <a:latin typeface="Calibri" pitchFamily="34" charset="0"/>
                 <a:ea typeface="Calibri" pitchFamily="34" charset="-122"/>
@@ -16677,130 +16917,6 @@
               <a:t>E. ABO antibodies only cause delayed reactions</a:t>
             </a:r>
             <a:endParaRPr lang="en-US" sz="1350" dirty="0"/>
-          </a:p>
-        </p:txBody>
-      </p:sp>
-      <p:sp>
-        <p:nvSpPr>
-          <p:cNvPr id="6" name="Shape 4"/>
-          <p:cNvSpPr/>
-          <p:nvPr/>
-        </p:nvSpPr>
-        <p:spPr>
-          <a:xfrm>
-            <a:off x="7201632" y="2395728"/>
-            <a:ext cx="4423136" cy="3246120"/>
-          </a:xfrm>
-          <a:prstGeom prst="roundRect">
-            <a:avLst>
-              <a:gd name="adj" fmla="val 2535"/>
-            </a:avLst>
-          </a:prstGeom>
-          <a:solidFill>
-            <a:srgbClr val="F8E7EF"/>
-          </a:solidFill>
-          <a:ln/>
-          <a:effectLst>
-            <a:outerShdw sx="100000" sy="100000" kx="0" ky="0" algn="bl" rotWithShape="0" blurRad="88900" dist="25400" dir="5400000">
-              <a:srgbClr val="22303C">
-                <a:alpha val="12000"/>
-              </a:srgbClr>
-            </a:outerShdw>
-          </a:effectLst>
-        </p:spPr>
-      </p:sp>
-      <p:sp>
-        <p:nvSpPr>
-          <p:cNvPr id="7" name="Text 5"/>
-          <p:cNvSpPr/>
-          <p:nvPr/>
-        </p:nvSpPr>
-        <p:spPr>
-          <a:xfrm>
-            <a:off x="7439376" y="2578608"/>
-            <a:ext cx="3965936" cy="457200"/>
-          </a:xfrm>
-          <a:prstGeom prst="rect">
-            <a:avLst/>
-          </a:prstGeom>
-          <a:noFill/>
-          <a:ln/>
-        </p:spPr>
-        <p:txBody>
-          <a:bodyPr wrap="square" lIns="0" tIns="0" rIns="0" bIns="0" rtlCol="0" anchor="ctr"/>
-          <a:lstStyle/>
-          <a:p>
-            <a:pPr indent="0" marL="0">
-              <a:buNone/>
-            </a:pPr>
-            <a:r>
-              <a:rPr lang="en-US" sz="1500" b="1" dirty="0">
-                <a:solidFill>
-                  <a:srgbClr val="AD1457"/>
-                </a:solidFill>
-                <a:latin typeface="Calibri" pitchFamily="34" charset="0"/>
-                <a:ea typeface="Calibri" pitchFamily="34" charset="-122"/>
-                <a:cs typeface="Calibri" pitchFamily="34" charset="-120"/>
-              </a:rPr>
-              <a:t>ANSWER  </a:t>
-            </a:r>
-            <a:pPr indent="0" marL="0">
-              <a:buNone/>
-            </a:pPr>
-            <a:r>
-              <a:rPr lang="en-US" sz="1500" b="1" dirty="0">
-                <a:solidFill>
-                  <a:srgbClr val="1B2A38"/>
-                </a:solidFill>
-                <a:latin typeface="Calibri" pitchFamily="34" charset="0"/>
-                <a:ea typeface="Calibri" pitchFamily="34" charset="-122"/>
-                <a:cs typeface="Calibri" pitchFamily="34" charset="-120"/>
-              </a:rPr>
-              <a:t>B — Naturally occurring IgM that fix complement</a:t>
-            </a:r>
-            <a:endParaRPr lang="en-US" sz="1500" dirty="0"/>
-          </a:p>
-        </p:txBody>
-      </p:sp>
-      <p:sp>
-        <p:nvSpPr>
-          <p:cNvPr id="8" name="Text 6"/>
-          <p:cNvSpPr/>
-          <p:nvPr/>
-        </p:nvSpPr>
-        <p:spPr>
-          <a:xfrm>
-            <a:off x="7439376" y="3127248"/>
-            <a:ext cx="3947648" cy="2377440"/>
-          </a:xfrm>
-          <a:prstGeom prst="rect">
-            <a:avLst/>
-          </a:prstGeom>
-          <a:noFill/>
-          <a:ln/>
-        </p:spPr>
-        <p:txBody>
-          <a:bodyPr wrap="square" lIns="0" tIns="0" rIns="0" bIns="0" rtlCol="0" anchor="t"/>
-          <a:lstStyle/>
-          <a:p>
-            <a:pPr algn="l" indent="0" marL="0">
-              <a:lnSpc>
-                <a:spcPct val="108000"/>
-              </a:lnSpc>
-              <a:buNone/>
-            </a:pPr>
-            <a:r>
-              <a:rPr lang="en-US" sz="1250" dirty="0">
-                <a:solidFill>
-                  <a:srgbClr val="33444F"/>
-                </a:solidFill>
-                <a:latin typeface="Calibri" pitchFamily="34" charset="0"/>
-                <a:ea typeface="Calibri" pitchFamily="34" charset="-122"/>
-                <a:cs typeface="Calibri" pitchFamily="34" charset="-120"/>
-              </a:rPr>
-              <a:t>ABO antibodies are IgM, present without prior exposure, and activate the full complement cascade — producing acute intravascular hemolysis. This is why ABO identity is the most safety-critical step.</a:t>
-            </a:r>
-            <a:endParaRPr lang="en-US" sz="1250" dirty="0"/>
           </a:p>
         </p:txBody>
       </p:sp>
@@ -17130,9 +17246,9 @@
               <a:buNone/>
             </a:pPr>
             <a:r>
-              <a:rPr lang="en-US" sz="1350" b="1" dirty="0">
-                <a:solidFill>
-                  <a:srgbClr val="7A0E3C"/>
+              <a:rPr lang="en-US" sz="1350" b="0" dirty="0">
+                <a:solidFill>
+                  <a:srgbClr val="33444F"/>
                 </a:solidFill>
                 <a:latin typeface="Calibri" pitchFamily="34" charset="0"/>
                 <a:ea typeface="Calibri" pitchFamily="34" charset="-122"/>
@@ -17181,130 +17297,6 @@
               <a:t>E. Rouleaux</a:t>
             </a:r>
             <a:endParaRPr lang="en-US" sz="1350" dirty="0"/>
-          </a:p>
-        </p:txBody>
-      </p:sp>
-      <p:sp>
-        <p:nvSpPr>
-          <p:cNvPr id="6" name="Shape 4"/>
-          <p:cNvSpPr/>
-          <p:nvPr/>
-        </p:nvSpPr>
-        <p:spPr>
-          <a:xfrm>
-            <a:off x="7201632" y="2395728"/>
-            <a:ext cx="4423136" cy="3246120"/>
-          </a:xfrm>
-          <a:prstGeom prst="roundRect">
-            <a:avLst>
-              <a:gd name="adj" fmla="val 2535"/>
-            </a:avLst>
-          </a:prstGeom>
-          <a:solidFill>
-            <a:srgbClr val="F8E7EF"/>
-          </a:solidFill>
-          <a:ln/>
-          <a:effectLst>
-            <a:outerShdw sx="100000" sy="100000" kx="0" ky="0" algn="bl" rotWithShape="0" blurRad="88900" dist="25400" dir="5400000">
-              <a:srgbClr val="22303C">
-                <a:alpha val="12000"/>
-              </a:srgbClr>
-            </a:outerShdw>
-          </a:effectLst>
-        </p:spPr>
-      </p:sp>
-      <p:sp>
-        <p:nvSpPr>
-          <p:cNvPr id="7" name="Text 5"/>
-          <p:cNvSpPr/>
-          <p:nvPr/>
-        </p:nvSpPr>
-        <p:spPr>
-          <a:xfrm>
-            <a:off x="7439376" y="2578608"/>
-            <a:ext cx="3965936" cy="457200"/>
-          </a:xfrm>
-          <a:prstGeom prst="rect">
-            <a:avLst/>
-          </a:prstGeom>
-          <a:noFill/>
-          <a:ln/>
-        </p:spPr>
-        <p:txBody>
-          <a:bodyPr wrap="square" lIns="0" tIns="0" rIns="0" bIns="0" rtlCol="0" anchor="ctr"/>
-          <a:lstStyle/>
-          <a:p>
-            <a:pPr indent="0" marL="0">
-              <a:buNone/>
-            </a:pPr>
-            <a:r>
-              <a:rPr lang="en-US" sz="1500" b="1" dirty="0">
-                <a:solidFill>
-                  <a:srgbClr val="AD1457"/>
-                </a:solidFill>
-                <a:latin typeface="Calibri" pitchFamily="34" charset="0"/>
-                <a:ea typeface="Calibri" pitchFamily="34" charset="-122"/>
-                <a:cs typeface="Calibri" pitchFamily="34" charset="-120"/>
-              </a:rPr>
-              <a:t>ANSWER  </a:t>
-            </a:r>
-            <a:pPr indent="0" marL="0">
-              <a:buNone/>
-            </a:pPr>
-            <a:r>
-              <a:rPr lang="en-US" sz="1500" b="1" dirty="0">
-                <a:solidFill>
-                  <a:srgbClr val="1B2A38"/>
-                </a:solidFill>
-                <a:latin typeface="Calibri" pitchFamily="34" charset="0"/>
-                <a:ea typeface="Calibri" pitchFamily="34" charset="-122"/>
-                <a:cs typeface="Calibri" pitchFamily="34" charset="-120"/>
-              </a:rPr>
-              <a:t>C — Bombay phenotype (Oh)</a:t>
-            </a:r>
-            <a:endParaRPr lang="en-US" sz="1500" dirty="0"/>
-          </a:p>
-        </p:txBody>
-      </p:sp>
-      <p:sp>
-        <p:nvSpPr>
-          <p:cNvPr id="8" name="Text 6"/>
-          <p:cNvSpPr/>
-          <p:nvPr/>
-        </p:nvSpPr>
-        <p:spPr>
-          <a:xfrm>
-            <a:off x="7439376" y="3127248"/>
-            <a:ext cx="3947648" cy="2377440"/>
-          </a:xfrm>
-          <a:prstGeom prst="rect">
-            <a:avLst/>
-          </a:prstGeom>
-          <a:noFill/>
-          <a:ln/>
-        </p:spPr>
-        <p:txBody>
-          <a:bodyPr wrap="square" lIns="0" tIns="0" rIns="0" bIns="0" rtlCol="0" anchor="t"/>
-          <a:lstStyle/>
-          <a:p>
-            <a:pPr algn="l" indent="0" marL="0">
-              <a:lnSpc>
-                <a:spcPct val="108000"/>
-              </a:lnSpc>
-              <a:buNone/>
-            </a:pPr>
-            <a:r>
-              <a:rPr lang="en-US" sz="1250" dirty="0">
-                <a:solidFill>
-                  <a:srgbClr val="33444F"/>
-                </a:solidFill>
-                <a:latin typeface="Calibri" pitchFamily="34" charset="0"/>
-                <a:ea typeface="Calibri" pitchFamily="34" charset="-122"/>
-                <a:cs typeface="Calibri" pitchFamily="34" charset="-120"/>
-              </a:rPr>
-              <a:t>Bombay individuals lack H antigen (hh) and make potent anti-H, so they appear group O but are incompatible with ordinary O cells and require Bombay units.</a:t>
-            </a:r>
-            <a:endParaRPr lang="en-US" sz="1250" dirty="0"/>
           </a:p>
         </p:txBody>
       </p:sp>
@@ -17614,9 +17606,9 @@
               <a:buNone/>
             </a:pPr>
             <a:r>
-              <a:rPr lang="en-US" sz="1350" b="1" dirty="0">
-                <a:solidFill>
-                  <a:srgbClr val="7A0E3C"/>
+              <a:rPr lang="en-US" sz="1350" b="0" dirty="0">
+                <a:solidFill>
+                  <a:srgbClr val="33444F"/>
                 </a:solidFill>
                 <a:latin typeface="Calibri" pitchFamily="34" charset="0"/>
                 <a:ea typeface="Calibri" pitchFamily="34" charset="-122"/>
@@ -17685,130 +17677,6 @@
               <a:t>E. Withhold all transfusion</a:t>
             </a:r>
             <a:endParaRPr lang="en-US" sz="1350" dirty="0"/>
-          </a:p>
-        </p:txBody>
-      </p:sp>
-      <p:sp>
-        <p:nvSpPr>
-          <p:cNvPr id="6" name="Shape 4"/>
-          <p:cNvSpPr/>
-          <p:nvPr/>
-        </p:nvSpPr>
-        <p:spPr>
-          <a:xfrm>
-            <a:off x="7201632" y="2395728"/>
-            <a:ext cx="4423136" cy="3246120"/>
-          </a:xfrm>
-          <a:prstGeom prst="roundRect">
-            <a:avLst>
-              <a:gd name="adj" fmla="val 2535"/>
-            </a:avLst>
-          </a:prstGeom>
-          <a:solidFill>
-            <a:srgbClr val="F8E7EF"/>
-          </a:solidFill>
-          <a:ln/>
-          <a:effectLst>
-            <a:outerShdw sx="100000" sy="100000" kx="0" ky="0" algn="bl" rotWithShape="0" blurRad="88900" dist="25400" dir="5400000">
-              <a:srgbClr val="22303C">
-                <a:alpha val="12000"/>
-              </a:srgbClr>
-            </a:outerShdw>
-          </a:effectLst>
-        </p:spPr>
-      </p:sp>
-      <p:sp>
-        <p:nvSpPr>
-          <p:cNvPr id="7" name="Text 5"/>
-          <p:cNvSpPr/>
-          <p:nvPr/>
-        </p:nvSpPr>
-        <p:spPr>
-          <a:xfrm>
-            <a:off x="7439376" y="2578608"/>
-            <a:ext cx="3965936" cy="457200"/>
-          </a:xfrm>
-          <a:prstGeom prst="rect">
-            <a:avLst/>
-          </a:prstGeom>
-          <a:noFill/>
-          <a:ln/>
-        </p:spPr>
-        <p:txBody>
-          <a:bodyPr wrap="square" lIns="0" tIns="0" rIns="0" bIns="0" rtlCol="0" anchor="ctr"/>
-          <a:lstStyle/>
-          <a:p>
-            <a:pPr indent="0" marL="0">
-              <a:buNone/>
-            </a:pPr>
-            <a:r>
-              <a:rPr lang="en-US" sz="1500" b="1" dirty="0">
-                <a:solidFill>
-                  <a:srgbClr val="AD1457"/>
-                </a:solidFill>
-                <a:latin typeface="Calibri" pitchFamily="34" charset="0"/>
-                <a:ea typeface="Calibri" pitchFamily="34" charset="-122"/>
-                <a:cs typeface="Calibri" pitchFamily="34" charset="-120"/>
-              </a:rPr>
-              <a:t>ANSWER  </a:t>
-            </a:r>
-            <a:pPr indent="0" marL="0">
-              <a:buNone/>
-            </a:pPr>
-            <a:r>
-              <a:rPr lang="en-US" sz="1500" b="1" dirty="0">
-                <a:solidFill>
-                  <a:srgbClr val="1B2A38"/>
-                </a:solidFill>
-                <a:latin typeface="Calibri" pitchFamily="34" charset="0"/>
-                <a:ea typeface="Calibri" pitchFamily="34" charset="-122"/>
-                <a:cs typeface="Calibri" pitchFamily="34" charset="-120"/>
-              </a:rPr>
-              <a:t>B — Treat the patient as Rh-negative</a:t>
-            </a:r>
-            <a:endParaRPr lang="en-US" sz="1500" dirty="0"/>
-          </a:p>
-        </p:txBody>
-      </p:sp>
-      <p:sp>
-        <p:nvSpPr>
-          <p:cNvPr id="8" name="Text 6"/>
-          <p:cNvSpPr/>
-          <p:nvPr/>
-        </p:nvSpPr>
-        <p:spPr>
-          <a:xfrm>
-            <a:off x="7439376" y="3127248"/>
-            <a:ext cx="3947648" cy="2377440"/>
-          </a:xfrm>
-          <a:prstGeom prst="rect">
-            <a:avLst/>
-          </a:prstGeom>
-          <a:noFill/>
-          <a:ln/>
-        </p:spPr>
-        <p:txBody>
-          <a:bodyPr wrap="square" lIns="0" tIns="0" rIns="0" bIns="0" rtlCol="0" anchor="t"/>
-          <a:lstStyle/>
-          <a:p>
-            <a:pPr algn="l" indent="0" marL="0">
-              <a:lnSpc>
-                <a:spcPct val="108000"/>
-              </a:lnSpc>
-              <a:buNone/>
-            </a:pPr>
-            <a:r>
-              <a:rPr lang="en-US" sz="1250" dirty="0">
-                <a:solidFill>
-                  <a:srgbClr val="33444F"/>
-                </a:solidFill>
-                <a:latin typeface="Calibri" pitchFamily="34" charset="0"/>
-                <a:ea typeface="Calibri" pitchFamily="34" charset="-122"/>
-                <a:cs typeface="Calibri" pitchFamily="34" charset="-120"/>
-              </a:rPr>
-              <a:t>For recipients, serologic weak D of uncertain type is managed as Rh-negative to avoid anti-D alloimmunization; RHD genotyping can reclassify many as Rh-positive. Donors with weak D are labeled Rh-positive.</a:t>
-            </a:r>
-            <a:endParaRPr lang="en-US" sz="1250" dirty="0"/>
           </a:p>
         </p:txBody>
       </p:sp>
@@ -18118,9 +17986,9 @@
               <a:buNone/>
             </a:pPr>
             <a:r>
-              <a:rPr lang="en-US" sz="1350" b="1" dirty="0">
-                <a:solidFill>
-                  <a:srgbClr val="7A0E3C"/>
+              <a:rPr lang="en-US" sz="1350" b="0" dirty="0">
+                <a:solidFill>
+                  <a:srgbClr val="33444F"/>
                 </a:solidFill>
                 <a:latin typeface="Calibri" pitchFamily="34" charset="0"/>
                 <a:ea typeface="Calibri" pitchFamily="34" charset="-122"/>
@@ -18189,130 +18057,6 @@
               <a:t>E. Group O plasma and group AB red cells</a:t>
             </a:r>
             <a:endParaRPr lang="en-US" sz="1350" dirty="0"/>
-          </a:p>
-        </p:txBody>
-      </p:sp>
-      <p:sp>
-        <p:nvSpPr>
-          <p:cNvPr id="6" name="Shape 4"/>
-          <p:cNvSpPr/>
-          <p:nvPr/>
-        </p:nvSpPr>
-        <p:spPr>
-          <a:xfrm>
-            <a:off x="7201632" y="2395728"/>
-            <a:ext cx="4423136" cy="3246120"/>
-          </a:xfrm>
-          <a:prstGeom prst="roundRect">
-            <a:avLst>
-              <a:gd name="adj" fmla="val 2535"/>
-            </a:avLst>
-          </a:prstGeom>
-          <a:solidFill>
-            <a:srgbClr val="F8E7EF"/>
-          </a:solidFill>
-          <a:ln/>
-          <a:effectLst>
-            <a:outerShdw sx="100000" sy="100000" kx="0" ky="0" algn="bl" rotWithShape="0" blurRad="88900" dist="25400" dir="5400000">
-              <a:srgbClr val="22303C">
-                <a:alpha val="12000"/>
-              </a:srgbClr>
-            </a:outerShdw>
-          </a:effectLst>
-        </p:spPr>
-      </p:sp>
-      <p:sp>
-        <p:nvSpPr>
-          <p:cNvPr id="7" name="Text 5"/>
-          <p:cNvSpPr/>
-          <p:nvPr/>
-        </p:nvSpPr>
-        <p:spPr>
-          <a:xfrm>
-            <a:off x="7439376" y="2578608"/>
-            <a:ext cx="3965936" cy="457200"/>
-          </a:xfrm>
-          <a:prstGeom prst="rect">
-            <a:avLst/>
-          </a:prstGeom>
-          <a:noFill/>
-          <a:ln/>
-        </p:spPr>
-        <p:txBody>
-          <a:bodyPr wrap="square" lIns="0" tIns="0" rIns="0" bIns="0" rtlCol="0" anchor="ctr"/>
-          <a:lstStyle/>
-          <a:p>
-            <a:pPr indent="0" marL="0">
-              <a:buNone/>
-            </a:pPr>
-            <a:r>
-              <a:rPr lang="en-US" sz="1500" b="1" dirty="0">
-                <a:solidFill>
-                  <a:srgbClr val="AD1457"/>
-                </a:solidFill>
-                <a:latin typeface="Calibri" pitchFamily="34" charset="0"/>
-                <a:ea typeface="Calibri" pitchFamily="34" charset="-122"/>
-                <a:cs typeface="Calibri" pitchFamily="34" charset="-120"/>
-              </a:rPr>
-              <a:t>ANSWER  </a:t>
-            </a:r>
-            <a:pPr indent="0" marL="0">
-              <a:buNone/>
-            </a:pPr>
-            <a:r>
-              <a:rPr lang="en-US" sz="1500" b="1" dirty="0">
-                <a:solidFill>
-                  <a:srgbClr val="1B2A38"/>
-                </a:solidFill>
-                <a:latin typeface="Calibri" pitchFamily="34" charset="0"/>
-                <a:ea typeface="Calibri" pitchFamily="34" charset="-122"/>
-                <a:cs typeface="Calibri" pitchFamily="34" charset="-120"/>
-              </a:rPr>
-              <a:t>B — Group O red cells and AB plasma</a:t>
-            </a:r>
-            <a:endParaRPr lang="en-US" sz="1500" dirty="0"/>
-          </a:p>
-        </p:txBody>
-      </p:sp>
-      <p:sp>
-        <p:nvSpPr>
-          <p:cNvPr id="8" name="Text 6"/>
-          <p:cNvSpPr/>
-          <p:nvPr/>
-        </p:nvSpPr>
-        <p:spPr>
-          <a:xfrm>
-            <a:off x="7439376" y="3127248"/>
-            <a:ext cx="3947648" cy="2377440"/>
-          </a:xfrm>
-          <a:prstGeom prst="rect">
-            <a:avLst/>
-          </a:prstGeom>
-          <a:noFill/>
-          <a:ln/>
-        </p:spPr>
-        <p:txBody>
-          <a:bodyPr wrap="square" lIns="0" tIns="0" rIns="0" bIns="0" rtlCol="0" anchor="t"/>
-          <a:lstStyle/>
-          <a:p>
-            <a:pPr algn="l" indent="0" marL="0">
-              <a:lnSpc>
-                <a:spcPct val="108000"/>
-              </a:lnSpc>
-              <a:buNone/>
-            </a:pPr>
-            <a:r>
-              <a:rPr lang="en-US" sz="1250" dirty="0">
-                <a:solidFill>
-                  <a:srgbClr val="33444F"/>
-                </a:solidFill>
-                <a:latin typeface="Calibri" pitchFamily="34" charset="0"/>
-                <a:ea typeface="Calibri" pitchFamily="34" charset="-122"/>
-                <a:cs typeface="Calibri" pitchFamily="34" charset="-120"/>
-              </a:rPr>
-              <a:t>Group O is the universal red-cell donor and AB is the universal plasma donor. Use O-negative red cells for females of childbearing potential; O-positive is acceptable otherwise.</a:t>
-            </a:r>
-            <a:endParaRPr lang="en-US" sz="1250" dirty="0"/>
           </a:p>
         </p:txBody>
       </p:sp>
@@ -18553,6 +18297,10 @@
           </a:solidFill>
           <a:ln/>
         </p:spPr>
+        <p:txBody>
+          <a:bodyPr/>
+          <a:p/>
+        </p:txBody>
       </p:sp>
       <p:sp>
         <p:nvSpPr>
@@ -18580,6 +18328,10 @@
             </a:outerShdw>
           </a:effectLst>
         </p:spPr>
+        <p:txBody>
+          <a:bodyPr/>
+          <a:p/>
+        </p:txBody>
       </p:sp>
       <p:sp>
         <p:nvSpPr>
@@ -18680,6 +18432,10 @@
           </a:solidFill>
           <a:ln/>
         </p:spPr>
+        <p:txBody>
+          <a:bodyPr/>
+          <a:p/>
+        </p:txBody>
       </p:sp>
       <p:sp>
         <p:nvSpPr>
@@ -18707,6 +18463,10 @@
             </a:outerShdw>
           </a:effectLst>
         </p:spPr>
+        <p:txBody>
+          <a:bodyPr/>
+          <a:p/>
+        </p:txBody>
       </p:sp>
       <p:sp>
         <p:nvSpPr>
@@ -18807,6 +18567,10 @@
           </a:solidFill>
           <a:ln/>
         </p:spPr>
+        <p:txBody>
+          <a:bodyPr/>
+          <a:p/>
+        </p:txBody>
       </p:sp>
       <p:sp>
         <p:nvSpPr>
@@ -18834,6 +18598,10 @@
             </a:outerShdw>
           </a:effectLst>
         </p:spPr>
+        <p:txBody>
+          <a:bodyPr/>
+          <a:p/>
+        </p:txBody>
       </p:sp>
       <p:sp>
         <p:nvSpPr>
@@ -18934,6 +18702,10 @@
           </a:solidFill>
           <a:ln/>
         </p:spPr>
+        <p:txBody>
+          <a:bodyPr/>
+          <a:p/>
+        </p:txBody>
       </p:sp>
       <p:sp>
         <p:nvSpPr>
@@ -18961,6 +18733,10 @@
             </a:outerShdw>
           </a:effectLst>
         </p:spPr>
+        <p:txBody>
+          <a:bodyPr/>
+          <a:p/>
+        </p:txBody>
       </p:sp>
       <p:sp>
         <p:nvSpPr>
@@ -19061,6 +18837,10 @@
           </a:solidFill>
           <a:ln/>
         </p:spPr>
+        <p:txBody>
+          <a:bodyPr/>
+          <a:p/>
+        </p:txBody>
       </p:sp>
       <p:sp>
         <p:nvSpPr>
@@ -19088,6 +18868,10 @@
             </a:outerShdw>
           </a:effectLst>
         </p:spPr>
+        <p:txBody>
+          <a:bodyPr/>
+          <a:p/>
+        </p:txBody>
       </p:sp>
       <p:sp>
         <p:nvSpPr>
@@ -19188,6 +18972,10 @@
           </a:solidFill>
           <a:ln/>
         </p:spPr>
+        <p:txBody>
+          <a:bodyPr/>
+          <a:p/>
+        </p:txBody>
       </p:sp>
       <p:sp>
         <p:nvSpPr>
@@ -19215,6 +19003,10 @@
             </a:outerShdw>
           </a:effectLst>
         </p:spPr>
+        <p:txBody>
+          <a:bodyPr/>
+          <a:p/>
+        </p:txBody>
       </p:sp>
       <p:sp>
         <p:nvSpPr>
@@ -19698,6 +19490,1488 @@
 </p:sld>
 </file>
 
+<file path=ppt/slides/slide37.xml><?xml version="1.0" encoding="utf-8"?>
+<p:sld xmlns:a="http://schemas.openxmlformats.org/drawingml/2006/main" xmlns:p="http://schemas.openxmlformats.org/presentationml/2006/main" xmlns:r="http://schemas.openxmlformats.org/officeDocument/2006/relationships">
+  <p:cSld>
+    <p:spTree>
+      <p:nvGrpSpPr>
+        <p:cNvPr id="1" name=""/>
+        <p:cNvGrpSpPr/>
+        <p:nvPr/>
+      </p:nvGrpSpPr>
+      <p:grpSpPr/>
+      <p:sp>
+        <p:nvSpPr>
+          <p:cNvPr id="2" name="Text 0"/>
+          <p:cNvSpPr/>
+          <p:nvPr/>
+        </p:nvSpPr>
+        <p:spPr>
+          <a:xfrm>
+            <a:off x="566928" y="329184"/>
+            <a:ext cx="10515600" cy="310896"/>
+          </a:xfrm>
+          <a:prstGeom prst="rect">
+            <a:avLst/>
+          </a:prstGeom>
+          <a:noFill/>
+          <a:ln/>
+        </p:spPr>
+        <p:txBody>
+          <a:bodyPr wrap="square" lIns="0" tIns="0" rIns="0" bIns="0" rtlCol="0" anchor="ctr"/>
+          <a:lstStyle/>
+          <a:p>
+            <a:pPr algn="l" indent="0" marL="0">
+              <a:buNone/>
+            </a:pPr>
+            <a:r>
+              <a:rPr lang="en-US" sz="1100" b="1" spc="150" kern="0" dirty="0">
+                <a:solidFill>
+                  <a:srgbClr val="AD1457"/>
+                </a:solidFill>
+                <a:latin typeface="Calibri" pitchFamily="34" charset="0"/>
+                <a:ea typeface="Calibri" pitchFamily="34" charset="-122"/>
+                <a:cs typeface="Calibri" pitchFamily="34" charset="-120"/>
+              </a:rPr>
+              <a:t>TRANSFUSION MEDICINE   ·   BOARD REVIEW  ·  Q4</a:t>
+            </a:r>
+            <a:endParaRPr lang="en-US" sz="1100" dirty="0"/>
+          </a:p>
+        </p:txBody>
+      </p:sp>
+      <p:sp>
+        <p:nvSpPr>
+          <p:cNvPr id="3" name="Text 1"/>
+          <p:cNvSpPr/>
+          <p:nvPr/>
+        </p:nvSpPr>
+        <p:spPr>
+          <a:xfrm>
+            <a:off x="566928" y="713232"/>
+            <a:ext cx="11064240" cy="749808"/>
+          </a:xfrm>
+          <a:prstGeom prst="rect">
+            <a:avLst/>
+          </a:prstGeom>
+          <a:noFill/>
+          <a:ln/>
+        </p:spPr>
+        <p:txBody>
+          <a:bodyPr wrap="square" lIns="0" tIns="0" rIns="0" bIns="0" rtlCol="0" anchor="ctr"/>
+          <a:lstStyle/>
+          <a:p>
+            <a:pPr algn="l" indent="0" marL="0">
+              <a:buNone/>
+            </a:pPr>
+            <a:r>
+              <a:rPr lang="en-US" sz="2600" b="1" dirty="0">
+                <a:solidFill>
+                  <a:srgbClr val="0E3A5F"/>
+                </a:solidFill>
+                <a:latin typeface="Calibri" pitchFamily="34" charset="0"/>
+                <a:ea typeface="Calibri" pitchFamily="34" charset="-122"/>
+                <a:cs typeface="Calibri" pitchFamily="34" charset="-120"/>
+              </a:rPr>
+              <a:t>Board-Style Review</a:t>
+            </a:r>
+            <a:endParaRPr lang="en-US" sz="2600" dirty="0"/>
+          </a:p>
+        </p:txBody>
+      </p:sp>
+      <p:sp>
+        <p:nvSpPr>
+          <p:cNvPr id="4" name="Text 2"/>
+          <p:cNvSpPr/>
+          <p:nvPr/>
+        </p:nvSpPr>
+        <p:spPr>
+          <a:xfrm>
+            <a:off x="566928" y="1417320"/>
+            <a:ext cx="11057839" cy="914400"/>
+          </a:xfrm>
+          <a:prstGeom prst="rect">
+            <a:avLst/>
+          </a:prstGeom>
+          <a:noFill/>
+          <a:ln/>
+        </p:spPr>
+        <p:txBody>
+          <a:bodyPr wrap="square" lIns="0" tIns="0" rIns="0" bIns="0" rtlCol="0" anchor="t"/>
+          <a:lstStyle/>
+          <a:p>
+            <a:pPr algn="l" indent="0" marL="0">
+              <a:lnSpc>
+                <a:spcPct val="105000"/>
+              </a:lnSpc>
+              <a:buNone/>
+            </a:pPr>
+            <a:r>
+              <a:rPr lang="en-US" sz="1450" b="1" dirty="0">
+                <a:solidFill>
+                  <a:srgbClr val="1B2A38"/>
+                </a:solidFill>
+                <a:latin typeface="Calibri" pitchFamily="34" charset="0"/>
+                <a:ea typeface="Calibri" pitchFamily="34" charset="-122"/>
+                <a:cs typeface="Calibri" pitchFamily="34" charset="-120"/>
+              </a:rPr>
+              <a:t>Which combination is correct for emergency release before a type and screen is available?</a:t>
+            </a:r>
+            <a:endParaRPr lang="en-US" sz="1450" dirty="0"/>
+          </a:p>
+        </p:txBody>
+      </p:sp>
+      <p:sp>
+        <p:nvSpPr>
+          <p:cNvPr id="5" name="Text 3"/>
+          <p:cNvSpPr/>
+          <p:nvPr/>
+        </p:nvSpPr>
+        <p:spPr>
+          <a:xfrm>
+            <a:off x="658368" y="2395728"/>
+            <a:ext cx="6192390" cy="3017520"/>
+          </a:xfrm>
+          <a:prstGeom prst="rect">
+            <a:avLst/>
+          </a:prstGeom>
+          <a:noFill/>
+          <a:ln/>
+        </p:spPr>
+        <p:txBody>
+          <a:bodyPr wrap="square" lIns="0" tIns="0" rIns="0" bIns="0" rtlCol="0" anchor="t"/>
+          <a:lstStyle/>
+          <a:p>
+            <a:pPr algn="l" indent="0" marL="0">
+              <a:spcAft>
+                <a:spcPts val="600"/>
+              </a:spcAft>
+              <a:buNone/>
+            </a:pPr>
+            <a:r>
+              <a:rPr lang="en-US" sz="1350" dirty="0">
+                <a:solidFill>
+                  <a:srgbClr val="33444F"/>
+                </a:solidFill>
+                <a:latin typeface="Calibri" pitchFamily="34" charset="0"/>
+                <a:ea typeface="Calibri" pitchFamily="34" charset="-122"/>
+                <a:cs typeface="Calibri" pitchFamily="34" charset="-120"/>
+              </a:rPr>
+              <a:t>A. Group AB red cells and group O plasma</a:t>
+            </a:r>
+            <a:endParaRPr lang="en-US" sz="1350" dirty="0"/>
+          </a:p>
+          <a:p>
+            <a:pPr algn="l" indent="0" marL="0">
+              <a:spcAft>
+                <a:spcPts val="600"/>
+              </a:spcAft>
+              <a:buNone/>
+            </a:pPr>
+            <a:r>
+              <a:rPr lang="en-US" sz="1350" b="1" dirty="0">
+                <a:solidFill>
+                  <a:srgbClr val="7A0E3C"/>
+                </a:solidFill>
+                <a:latin typeface="Calibri" pitchFamily="34" charset="0"/>
+                <a:ea typeface="Calibri" pitchFamily="34" charset="-122"/>
+                <a:cs typeface="Calibri" pitchFamily="34" charset="-120"/>
+              </a:rPr>
+              <a:t>B. Group O red cells and group AB plasma</a:t>
+            </a:r>
+            <a:endParaRPr lang="en-US" sz="1350" dirty="0"/>
+          </a:p>
+          <a:p>
+            <a:pPr algn="l" indent="0" marL="0">
+              <a:spcAft>
+                <a:spcPts val="600"/>
+              </a:spcAft>
+              <a:buNone/>
+            </a:pPr>
+            <a:r>
+              <a:rPr lang="en-US" sz="1350" dirty="0">
+                <a:solidFill>
+                  <a:srgbClr val="33444F"/>
+                </a:solidFill>
+                <a:latin typeface="Calibri" pitchFamily="34" charset="0"/>
+                <a:ea typeface="Calibri" pitchFamily="34" charset="-122"/>
+                <a:cs typeface="Calibri" pitchFamily="34" charset="-120"/>
+              </a:rPr>
+              <a:t>C. Group A red cells and group A plasma</a:t>
+            </a:r>
+            <a:endParaRPr lang="en-US" sz="1350" dirty="0"/>
+          </a:p>
+          <a:p>
+            <a:pPr algn="l" indent="0" marL="0">
+              <a:spcAft>
+                <a:spcPts val="600"/>
+              </a:spcAft>
+              <a:buNone/>
+            </a:pPr>
+            <a:r>
+              <a:rPr lang="en-US" sz="1350" dirty="0">
+                <a:solidFill>
+                  <a:srgbClr val="33444F"/>
+                </a:solidFill>
+                <a:latin typeface="Calibri" pitchFamily="34" charset="0"/>
+                <a:ea typeface="Calibri" pitchFamily="34" charset="-122"/>
+                <a:cs typeface="Calibri" pitchFamily="34" charset="-120"/>
+              </a:rPr>
+              <a:t>D. Patient must wait for full crossmatch</a:t>
+            </a:r>
+            <a:endParaRPr lang="en-US" sz="1350" dirty="0"/>
+          </a:p>
+          <a:p>
+            <a:pPr algn="l" indent="0" marL="0">
+              <a:spcAft>
+                <a:spcPts val="600"/>
+              </a:spcAft>
+              <a:buNone/>
+            </a:pPr>
+            <a:r>
+              <a:rPr lang="en-US" sz="1350" dirty="0">
+                <a:solidFill>
+                  <a:srgbClr val="33444F"/>
+                </a:solidFill>
+                <a:latin typeface="Calibri" pitchFamily="34" charset="0"/>
+                <a:ea typeface="Calibri" pitchFamily="34" charset="-122"/>
+                <a:cs typeface="Calibri" pitchFamily="34" charset="-120"/>
+              </a:rPr>
+              <a:t>E. Group O plasma and group AB red cells</a:t>
+            </a:r>
+            <a:endParaRPr lang="en-US" sz="1350" dirty="0"/>
+          </a:p>
+        </p:txBody>
+      </p:sp>
+      <p:sp>
+        <p:nvSpPr>
+          <p:cNvPr id="6" name="Shape 4"/>
+          <p:cNvSpPr/>
+          <p:nvPr/>
+        </p:nvSpPr>
+        <p:spPr>
+          <a:xfrm>
+            <a:off x="7201632" y="2395728"/>
+            <a:ext cx="4423136" cy="3246120"/>
+          </a:xfrm>
+          <a:prstGeom prst="roundRect">
+            <a:avLst>
+              <a:gd name="adj" fmla="val 2535"/>
+            </a:avLst>
+          </a:prstGeom>
+          <a:solidFill>
+            <a:srgbClr val="F8E7EF"/>
+          </a:solidFill>
+          <a:ln/>
+          <a:effectLst>
+            <a:outerShdw sx="100000" sy="100000" kx="0" ky="0" algn="bl" rotWithShape="0" blurRad="88900" dist="25400" dir="5400000">
+              <a:srgbClr val="22303C">
+                <a:alpha val="12000"/>
+              </a:srgbClr>
+            </a:outerShdw>
+          </a:effectLst>
+        </p:spPr>
+        <p:txBody>
+          <a:bodyPr/>
+          <a:p/>
+        </p:txBody>
+      </p:sp>
+      <p:sp>
+        <p:nvSpPr>
+          <p:cNvPr id="7" name="Text 5"/>
+          <p:cNvSpPr/>
+          <p:nvPr/>
+        </p:nvSpPr>
+        <p:spPr>
+          <a:xfrm>
+            <a:off x="7439376" y="2578608"/>
+            <a:ext cx="3965936" cy="457200"/>
+          </a:xfrm>
+          <a:prstGeom prst="rect">
+            <a:avLst/>
+          </a:prstGeom>
+          <a:noFill/>
+          <a:ln/>
+        </p:spPr>
+        <p:txBody>
+          <a:bodyPr wrap="square" lIns="0" tIns="0" rIns="0" bIns="0" rtlCol="0" anchor="ctr"/>
+          <a:lstStyle/>
+          <a:p>
+            <a:pPr indent="0" marL="0">
+              <a:buNone/>
+            </a:pPr>
+            <a:r>
+              <a:rPr lang="en-US" sz="1500" b="1" dirty="0">
+                <a:solidFill>
+                  <a:srgbClr val="AD1457"/>
+                </a:solidFill>
+                <a:latin typeface="Calibri" pitchFamily="34" charset="0"/>
+                <a:ea typeface="Calibri" pitchFamily="34" charset="-122"/>
+                <a:cs typeface="Calibri" pitchFamily="34" charset="-120"/>
+              </a:rPr>
+              <a:t>ANSWER  </a:t>
+            </a:r>
+            <a:pPr indent="0" marL="0">
+              <a:buNone/>
+            </a:pPr>
+            <a:r>
+              <a:rPr lang="en-US" sz="1500" b="1" dirty="0">
+                <a:solidFill>
+                  <a:srgbClr val="1B2A38"/>
+                </a:solidFill>
+                <a:latin typeface="Calibri" pitchFamily="34" charset="0"/>
+                <a:ea typeface="Calibri" pitchFamily="34" charset="-122"/>
+                <a:cs typeface="Calibri" pitchFamily="34" charset="-120"/>
+              </a:rPr>
+              <a:t>B — Group O red cells and AB plasma</a:t>
+            </a:r>
+            <a:endParaRPr lang="en-US" sz="1500" dirty="0"/>
+          </a:p>
+        </p:txBody>
+      </p:sp>
+      <p:sp>
+        <p:nvSpPr>
+          <p:cNvPr id="8" name="Text 6"/>
+          <p:cNvSpPr/>
+          <p:nvPr/>
+        </p:nvSpPr>
+        <p:spPr>
+          <a:xfrm>
+            <a:off x="7439376" y="3127248"/>
+            <a:ext cx="3947648" cy="2377440"/>
+          </a:xfrm>
+          <a:prstGeom prst="rect">
+            <a:avLst/>
+          </a:prstGeom>
+          <a:noFill/>
+          <a:ln/>
+        </p:spPr>
+        <p:txBody>
+          <a:bodyPr wrap="square" lIns="0" tIns="0" rIns="0" bIns="0" rtlCol="0" anchor="t"/>
+          <a:lstStyle/>
+          <a:p>
+            <a:pPr algn="l" indent="0" marL="0">
+              <a:lnSpc>
+                <a:spcPct val="108000"/>
+              </a:lnSpc>
+              <a:buNone/>
+            </a:pPr>
+            <a:r>
+              <a:rPr lang="en-US" sz="1250" dirty="0">
+                <a:solidFill>
+                  <a:srgbClr val="33444F"/>
+                </a:solidFill>
+                <a:latin typeface="Calibri" pitchFamily="34" charset="0"/>
+                <a:ea typeface="Calibri" pitchFamily="34" charset="-122"/>
+                <a:cs typeface="Calibri" pitchFamily="34" charset="-120"/>
+              </a:rPr>
+              <a:t>Group O is the universal red-cell donor and AB is the universal plasma donor. Use O-negative red cells for females of childbearing potential; O-positive is acceptable otherwise.</a:t>
+            </a:r>
+            <a:endParaRPr lang="en-US" sz="1250" dirty="0"/>
+          </a:p>
+        </p:txBody>
+      </p:sp>
+      <p:sp>
+        <p:nvSpPr>
+          <p:cNvPr id="9" name="Text 7"/>
+          <p:cNvSpPr/>
+          <p:nvPr/>
+        </p:nvSpPr>
+        <p:spPr>
+          <a:xfrm>
+            <a:off x="566928" y="6473952"/>
+            <a:ext cx="7772400" cy="274320"/>
+          </a:xfrm>
+          <a:prstGeom prst="rect">
+            <a:avLst/>
+          </a:prstGeom>
+          <a:noFill/>
+          <a:ln/>
+        </p:spPr>
+        <p:txBody>
+          <a:bodyPr wrap="square" lIns="0" tIns="0" rIns="0" bIns="0" rtlCol="0" anchor="ctr"/>
+          <a:lstStyle/>
+          <a:p>
+            <a:pPr algn="l" indent="0" marL="0">
+              <a:buNone/>
+            </a:pPr>
+            <a:r>
+              <a:rPr lang="en-US" sz="850" dirty="0">
+                <a:solidFill>
+                  <a:srgbClr val="9AA8B4"/>
+                </a:solidFill>
+                <a:latin typeface="Calibri" pitchFamily="34" charset="0"/>
+                <a:ea typeface="Calibri" pitchFamily="34" charset="-122"/>
+                <a:cs typeface="Calibri" pitchFamily="34" charset="-120"/>
+              </a:rPr>
+              <a:t>Makassed General Hospital  ·  Department of Laboratory Medicine</a:t>
+            </a:r>
+            <a:endParaRPr lang="en-US" sz="850" dirty="0"/>
+          </a:p>
+        </p:txBody>
+      </p:sp>
+      <p:sp>
+        <p:nvSpPr>
+          <p:cNvPr id="10" name="Text 8"/>
+          <p:cNvSpPr/>
+          <p:nvPr/>
+        </p:nvSpPr>
+        <p:spPr>
+          <a:xfrm>
+            <a:off x="9814255" y="6473952"/>
+            <a:ext cx="1828800" cy="274320"/>
+          </a:xfrm>
+          <a:prstGeom prst="rect">
+            <a:avLst/>
+          </a:prstGeom>
+          <a:noFill/>
+          <a:ln/>
+        </p:spPr>
+        <p:txBody>
+          <a:bodyPr wrap="square" lIns="0" tIns="0" rIns="0" bIns="0" rtlCol="0" anchor="ctr"/>
+          <a:lstStyle/>
+          <a:p>
+            <a:pPr algn="r" indent="0" marL="0">
+              <a:buNone/>
+            </a:pPr>
+            <a:r>
+              <a:rPr lang="en-US" sz="850" dirty="0">
+                <a:solidFill>
+                  <a:srgbClr val="9AA8B4"/>
+                </a:solidFill>
+                <a:latin typeface="Calibri" pitchFamily="34" charset="0"/>
+                <a:ea typeface="Calibri" pitchFamily="34" charset="-122"/>
+                <a:cs typeface="Calibri" pitchFamily="34" charset="-120"/>
+              </a:rPr>
+              <a:t>CP Lecture Series</a:t>
+            </a:r>
+            <a:pPr algn="r" indent="0" marL="0">
+              <a:buNone/>
+            </a:pPr>
+            <a:r>
+              <a:rPr lang="en-US" sz="850" dirty="0">
+                <a:solidFill>
+                  <a:srgbClr val="DCE4EC"/>
+                </a:solidFill>
+                <a:latin typeface="Calibri" pitchFamily="34" charset="0"/>
+                <a:ea typeface="Calibri" pitchFamily="34" charset="-122"/>
+                <a:cs typeface="Calibri" pitchFamily="34" charset="-120"/>
+              </a:rPr>
+              <a:t>   ·   </a:t>
+            </a:r>
+            <a:pPr algn="r" indent="0" marL="0">
+              <a:buNone/>
+            </a:pPr>
+            <a:r>
+              <a:rPr lang="en-US" sz="850" b="1" dirty="0">
+                <a:solidFill>
+                  <a:srgbClr val="AD1457"/>
+                </a:solidFill>
+                <a:latin typeface="Calibri" pitchFamily="34" charset="0"/>
+                <a:ea typeface="Calibri" pitchFamily="34" charset="-122"/>
+                <a:cs typeface="Calibri" pitchFamily="34" charset="-120"/>
+              </a:rPr>
+              <a:t>28</a:t>
+            </a:r>
+            <a:endParaRPr lang="en-US" sz="850" dirty="0"/>
+          </a:p>
+        </p:txBody>
+      </p:sp>
+    </p:spTree>
+  </p:cSld>
+  <p:clrMapOvr>
+    <a:masterClrMapping/>
+  </p:clrMapOvr>
+</p:sld>
+</file>
+
+<file path=ppt/slides/slide38.xml><?xml version="1.0" encoding="utf-8"?>
+<p:sld xmlns:a="http://schemas.openxmlformats.org/drawingml/2006/main" xmlns:p="http://schemas.openxmlformats.org/presentationml/2006/main" xmlns:r="http://schemas.openxmlformats.org/officeDocument/2006/relationships">
+  <p:cSld>
+    <p:spTree>
+      <p:nvGrpSpPr>
+        <p:cNvPr id="1" name=""/>
+        <p:cNvGrpSpPr/>
+        <p:nvPr/>
+      </p:nvGrpSpPr>
+      <p:grpSpPr/>
+      <p:sp>
+        <p:nvSpPr>
+          <p:cNvPr id="2" name="Text 0"/>
+          <p:cNvSpPr/>
+          <p:nvPr/>
+        </p:nvSpPr>
+        <p:spPr>
+          <a:xfrm>
+            <a:off x="566928" y="329184"/>
+            <a:ext cx="10515600" cy="310896"/>
+          </a:xfrm>
+          <a:prstGeom prst="rect">
+            <a:avLst/>
+          </a:prstGeom>
+          <a:noFill/>
+          <a:ln/>
+        </p:spPr>
+        <p:txBody>
+          <a:bodyPr wrap="square" lIns="0" tIns="0" rIns="0" bIns="0" rtlCol="0" anchor="ctr"/>
+          <a:lstStyle/>
+          <a:p>
+            <a:pPr algn="l" indent="0" marL="0">
+              <a:buNone/>
+            </a:pPr>
+            <a:r>
+              <a:rPr lang="en-US" sz="1100" b="1" spc="150" kern="0" dirty="0">
+                <a:solidFill>
+                  <a:srgbClr val="AD1457"/>
+                </a:solidFill>
+                <a:latin typeface="Calibri" pitchFamily="34" charset="0"/>
+                <a:ea typeface="Calibri" pitchFamily="34" charset="-122"/>
+                <a:cs typeface="Calibri" pitchFamily="34" charset="-120"/>
+              </a:rPr>
+              <a:t>TRANSFUSION MEDICINE   ·   BOARD REVIEW  ·  Q3</a:t>
+            </a:r>
+            <a:endParaRPr lang="en-US" sz="1100" dirty="0"/>
+          </a:p>
+        </p:txBody>
+      </p:sp>
+      <p:sp>
+        <p:nvSpPr>
+          <p:cNvPr id="3" name="Text 1"/>
+          <p:cNvSpPr/>
+          <p:nvPr/>
+        </p:nvSpPr>
+        <p:spPr>
+          <a:xfrm>
+            <a:off x="566928" y="713232"/>
+            <a:ext cx="11064240" cy="749808"/>
+          </a:xfrm>
+          <a:prstGeom prst="rect">
+            <a:avLst/>
+          </a:prstGeom>
+          <a:noFill/>
+          <a:ln/>
+        </p:spPr>
+        <p:txBody>
+          <a:bodyPr wrap="square" lIns="0" tIns="0" rIns="0" bIns="0" rtlCol="0" anchor="ctr"/>
+          <a:lstStyle/>
+          <a:p>
+            <a:pPr algn="l" indent="0" marL="0">
+              <a:buNone/>
+            </a:pPr>
+            <a:r>
+              <a:rPr lang="en-US" sz="2600" b="1" dirty="0">
+                <a:solidFill>
+                  <a:srgbClr val="0E3A5F"/>
+                </a:solidFill>
+                <a:latin typeface="Calibri" pitchFamily="34" charset="0"/>
+                <a:ea typeface="Calibri" pitchFamily="34" charset="-122"/>
+                <a:cs typeface="Calibri" pitchFamily="34" charset="-120"/>
+              </a:rPr>
+              <a:t>Board-Style Review</a:t>
+            </a:r>
+            <a:endParaRPr lang="en-US" sz="2600" dirty="0"/>
+          </a:p>
+        </p:txBody>
+      </p:sp>
+      <p:sp>
+        <p:nvSpPr>
+          <p:cNvPr id="4" name="Text 2"/>
+          <p:cNvSpPr/>
+          <p:nvPr/>
+        </p:nvSpPr>
+        <p:spPr>
+          <a:xfrm>
+            <a:off x="566928" y="1417320"/>
+            <a:ext cx="11057839" cy="914400"/>
+          </a:xfrm>
+          <a:prstGeom prst="rect">
+            <a:avLst/>
+          </a:prstGeom>
+          <a:noFill/>
+          <a:ln/>
+        </p:spPr>
+        <p:txBody>
+          <a:bodyPr wrap="square" lIns="0" tIns="0" rIns="0" bIns="0" rtlCol="0" anchor="t"/>
+          <a:lstStyle/>
+          <a:p>
+            <a:pPr algn="l" indent="0" marL="0">
+              <a:lnSpc>
+                <a:spcPct val="105000"/>
+              </a:lnSpc>
+              <a:buNone/>
+            </a:pPr>
+            <a:r>
+              <a:rPr lang="en-US" sz="1450" b="1" dirty="0">
+                <a:solidFill>
+                  <a:srgbClr val="1B2A38"/>
+                </a:solidFill>
+                <a:latin typeface="Calibri" pitchFamily="34" charset="0"/>
+                <a:ea typeface="Calibri" pitchFamily="34" charset="-122"/>
+                <a:cs typeface="Calibri" pitchFamily="34" charset="-120"/>
+              </a:rPr>
+              <a:t>A recipient sample shows serologic weak D of uncertain type. How should the patient be managed for transfusion?</a:t>
+            </a:r>
+            <a:endParaRPr lang="en-US" sz="1450" dirty="0"/>
+          </a:p>
+        </p:txBody>
+      </p:sp>
+      <p:sp>
+        <p:nvSpPr>
+          <p:cNvPr id="5" name="Text 3"/>
+          <p:cNvSpPr/>
+          <p:nvPr/>
+        </p:nvSpPr>
+        <p:spPr>
+          <a:xfrm>
+            <a:off x="658368" y="2395728"/>
+            <a:ext cx="6192390" cy="3017520"/>
+          </a:xfrm>
+          <a:prstGeom prst="rect">
+            <a:avLst/>
+          </a:prstGeom>
+          <a:noFill/>
+          <a:ln/>
+        </p:spPr>
+        <p:txBody>
+          <a:bodyPr wrap="square" lIns="0" tIns="0" rIns="0" bIns="0" rtlCol="0" anchor="t"/>
+          <a:lstStyle/>
+          <a:p>
+            <a:pPr algn="l" indent="0" marL="0">
+              <a:spcAft>
+                <a:spcPts val="600"/>
+              </a:spcAft>
+              <a:buNone/>
+            </a:pPr>
+            <a:r>
+              <a:rPr lang="en-US" sz="1350" dirty="0">
+                <a:solidFill>
+                  <a:srgbClr val="33444F"/>
+                </a:solidFill>
+                <a:latin typeface="Calibri" pitchFamily="34" charset="0"/>
+                <a:ea typeface="Calibri" pitchFamily="34" charset="-122"/>
+                <a:cs typeface="Calibri" pitchFamily="34" charset="-120"/>
+              </a:rPr>
+              <a:t>A. As Rh-positive; give Rh-positive units</a:t>
+            </a:r>
+            <a:endParaRPr lang="en-US" sz="1350" dirty="0"/>
+          </a:p>
+          <a:p>
+            <a:pPr algn="l" indent="0" marL="0">
+              <a:spcAft>
+                <a:spcPts val="600"/>
+              </a:spcAft>
+              <a:buNone/>
+            </a:pPr>
+            <a:r>
+              <a:rPr lang="en-US" sz="1350" b="1" dirty="0">
+                <a:solidFill>
+                  <a:srgbClr val="7A0E3C"/>
+                </a:solidFill>
+                <a:latin typeface="Calibri" pitchFamily="34" charset="0"/>
+                <a:ea typeface="Calibri" pitchFamily="34" charset="-122"/>
+                <a:cs typeface="Calibri" pitchFamily="34" charset="-120"/>
+              </a:rPr>
+              <a:t>B. As Rh-negative; give Rh-negative units and consider RhIG</a:t>
+            </a:r>
+            <a:endParaRPr lang="en-US" sz="1350" dirty="0"/>
+          </a:p>
+          <a:p>
+            <a:pPr algn="l" indent="0" marL="0">
+              <a:spcAft>
+                <a:spcPts val="600"/>
+              </a:spcAft>
+              <a:buNone/>
+            </a:pPr>
+            <a:r>
+              <a:rPr lang="en-US" sz="1350" dirty="0">
+                <a:solidFill>
+                  <a:srgbClr val="33444F"/>
+                </a:solidFill>
+                <a:latin typeface="Calibri" pitchFamily="34" charset="0"/>
+                <a:ea typeface="Calibri" pitchFamily="34" charset="-122"/>
+                <a:cs typeface="Calibri" pitchFamily="34" charset="-120"/>
+              </a:rPr>
+              <a:t>C. No Rh consideration is needed</a:t>
+            </a:r>
+            <a:endParaRPr lang="en-US" sz="1350" dirty="0"/>
+          </a:p>
+          <a:p>
+            <a:pPr algn="l" indent="0" marL="0">
+              <a:spcAft>
+                <a:spcPts val="600"/>
+              </a:spcAft>
+              <a:buNone/>
+            </a:pPr>
+            <a:r>
+              <a:rPr lang="en-US" sz="1350" dirty="0">
+                <a:solidFill>
+                  <a:srgbClr val="33444F"/>
+                </a:solidFill>
+                <a:latin typeface="Calibri" pitchFamily="34" charset="0"/>
+                <a:ea typeface="Calibri" pitchFamily="34" charset="-122"/>
+                <a:cs typeface="Calibri" pitchFamily="34" charset="-120"/>
+              </a:rPr>
+              <a:t>D. Give only AB plasma</a:t>
+            </a:r>
+            <a:endParaRPr lang="en-US" sz="1350" dirty="0"/>
+          </a:p>
+          <a:p>
+            <a:pPr algn="l" indent="0" marL="0">
+              <a:spcAft>
+                <a:spcPts val="600"/>
+              </a:spcAft>
+              <a:buNone/>
+            </a:pPr>
+            <a:r>
+              <a:rPr lang="en-US" sz="1350" dirty="0">
+                <a:solidFill>
+                  <a:srgbClr val="33444F"/>
+                </a:solidFill>
+                <a:latin typeface="Calibri" pitchFamily="34" charset="0"/>
+                <a:ea typeface="Calibri" pitchFamily="34" charset="-122"/>
+                <a:cs typeface="Calibri" pitchFamily="34" charset="-120"/>
+              </a:rPr>
+              <a:t>E. Withhold all transfusion</a:t>
+            </a:r>
+            <a:endParaRPr lang="en-US" sz="1350" dirty="0"/>
+          </a:p>
+        </p:txBody>
+      </p:sp>
+      <p:sp>
+        <p:nvSpPr>
+          <p:cNvPr id="6" name="Shape 4"/>
+          <p:cNvSpPr/>
+          <p:nvPr/>
+        </p:nvSpPr>
+        <p:spPr>
+          <a:xfrm>
+            <a:off x="7201632" y="2395728"/>
+            <a:ext cx="4423136" cy="3246120"/>
+          </a:xfrm>
+          <a:prstGeom prst="roundRect">
+            <a:avLst>
+              <a:gd name="adj" fmla="val 2535"/>
+            </a:avLst>
+          </a:prstGeom>
+          <a:solidFill>
+            <a:srgbClr val="F8E7EF"/>
+          </a:solidFill>
+          <a:ln/>
+          <a:effectLst>
+            <a:outerShdw sx="100000" sy="100000" kx="0" ky="0" algn="bl" rotWithShape="0" blurRad="88900" dist="25400" dir="5400000">
+              <a:srgbClr val="22303C">
+                <a:alpha val="12000"/>
+              </a:srgbClr>
+            </a:outerShdw>
+          </a:effectLst>
+        </p:spPr>
+        <p:txBody>
+          <a:bodyPr/>
+          <a:p/>
+        </p:txBody>
+      </p:sp>
+      <p:sp>
+        <p:nvSpPr>
+          <p:cNvPr id="7" name="Text 5"/>
+          <p:cNvSpPr/>
+          <p:nvPr/>
+        </p:nvSpPr>
+        <p:spPr>
+          <a:xfrm>
+            <a:off x="7439376" y="2578608"/>
+            <a:ext cx="3965936" cy="457200"/>
+          </a:xfrm>
+          <a:prstGeom prst="rect">
+            <a:avLst/>
+          </a:prstGeom>
+          <a:noFill/>
+          <a:ln/>
+        </p:spPr>
+        <p:txBody>
+          <a:bodyPr wrap="square" lIns="0" tIns="0" rIns="0" bIns="0" rtlCol="0" anchor="ctr"/>
+          <a:lstStyle/>
+          <a:p>
+            <a:pPr indent="0" marL="0">
+              <a:buNone/>
+            </a:pPr>
+            <a:r>
+              <a:rPr lang="en-US" sz="1500" b="1" dirty="0">
+                <a:solidFill>
+                  <a:srgbClr val="AD1457"/>
+                </a:solidFill>
+                <a:latin typeface="Calibri" pitchFamily="34" charset="0"/>
+                <a:ea typeface="Calibri" pitchFamily="34" charset="-122"/>
+                <a:cs typeface="Calibri" pitchFamily="34" charset="-120"/>
+              </a:rPr>
+              <a:t>ANSWER  </a:t>
+            </a:r>
+            <a:pPr indent="0" marL="0">
+              <a:buNone/>
+            </a:pPr>
+            <a:r>
+              <a:rPr lang="en-US" sz="1500" b="1" dirty="0">
+                <a:solidFill>
+                  <a:srgbClr val="1B2A38"/>
+                </a:solidFill>
+                <a:latin typeface="Calibri" pitchFamily="34" charset="0"/>
+                <a:ea typeface="Calibri" pitchFamily="34" charset="-122"/>
+                <a:cs typeface="Calibri" pitchFamily="34" charset="-120"/>
+              </a:rPr>
+              <a:t>B — Treat the patient as Rh-negative</a:t>
+            </a:r>
+            <a:endParaRPr lang="en-US" sz="1500" dirty="0"/>
+          </a:p>
+        </p:txBody>
+      </p:sp>
+      <p:sp>
+        <p:nvSpPr>
+          <p:cNvPr id="8" name="Text 6"/>
+          <p:cNvSpPr/>
+          <p:nvPr/>
+        </p:nvSpPr>
+        <p:spPr>
+          <a:xfrm>
+            <a:off x="7439376" y="3127248"/>
+            <a:ext cx="3947648" cy="2377440"/>
+          </a:xfrm>
+          <a:prstGeom prst="rect">
+            <a:avLst/>
+          </a:prstGeom>
+          <a:noFill/>
+          <a:ln/>
+        </p:spPr>
+        <p:txBody>
+          <a:bodyPr wrap="square" lIns="0" tIns="0" rIns="0" bIns="0" rtlCol="0" anchor="t"/>
+          <a:lstStyle/>
+          <a:p>
+            <a:pPr algn="l" indent="0" marL="0">
+              <a:lnSpc>
+                <a:spcPct val="108000"/>
+              </a:lnSpc>
+              <a:buNone/>
+            </a:pPr>
+            <a:r>
+              <a:rPr lang="en-US" sz="1250" dirty="0">
+                <a:solidFill>
+                  <a:srgbClr val="33444F"/>
+                </a:solidFill>
+                <a:latin typeface="Calibri" pitchFamily="34" charset="0"/>
+                <a:ea typeface="Calibri" pitchFamily="34" charset="-122"/>
+                <a:cs typeface="Calibri" pitchFamily="34" charset="-120"/>
+              </a:rPr>
+              <a:t>For recipients, serologic weak D of uncertain type is managed as Rh-negative to avoid anti-D alloimmunization; RHD genotyping can reclassify many as Rh-positive. Donors with weak D are labeled Rh-positive.</a:t>
+            </a:r>
+            <a:endParaRPr lang="en-US" sz="1250" dirty="0"/>
+          </a:p>
+        </p:txBody>
+      </p:sp>
+      <p:sp>
+        <p:nvSpPr>
+          <p:cNvPr id="9" name="Text 7"/>
+          <p:cNvSpPr/>
+          <p:nvPr/>
+        </p:nvSpPr>
+        <p:spPr>
+          <a:xfrm>
+            <a:off x="566928" y="6473952"/>
+            <a:ext cx="7772400" cy="274320"/>
+          </a:xfrm>
+          <a:prstGeom prst="rect">
+            <a:avLst/>
+          </a:prstGeom>
+          <a:noFill/>
+          <a:ln/>
+        </p:spPr>
+        <p:txBody>
+          <a:bodyPr wrap="square" lIns="0" tIns="0" rIns="0" bIns="0" rtlCol="0" anchor="ctr"/>
+          <a:lstStyle/>
+          <a:p>
+            <a:pPr algn="l" indent="0" marL="0">
+              <a:buNone/>
+            </a:pPr>
+            <a:r>
+              <a:rPr lang="en-US" sz="850" dirty="0">
+                <a:solidFill>
+                  <a:srgbClr val="9AA8B4"/>
+                </a:solidFill>
+                <a:latin typeface="Calibri" pitchFamily="34" charset="0"/>
+                <a:ea typeface="Calibri" pitchFamily="34" charset="-122"/>
+                <a:cs typeface="Calibri" pitchFamily="34" charset="-120"/>
+              </a:rPr>
+              <a:t>Makassed General Hospital  ·  Department of Laboratory Medicine</a:t>
+            </a:r>
+            <a:endParaRPr lang="en-US" sz="850" dirty="0"/>
+          </a:p>
+        </p:txBody>
+      </p:sp>
+      <p:sp>
+        <p:nvSpPr>
+          <p:cNvPr id="10" name="Text 8"/>
+          <p:cNvSpPr/>
+          <p:nvPr/>
+        </p:nvSpPr>
+        <p:spPr>
+          <a:xfrm>
+            <a:off x="9814255" y="6473952"/>
+            <a:ext cx="1828800" cy="274320"/>
+          </a:xfrm>
+          <a:prstGeom prst="rect">
+            <a:avLst/>
+          </a:prstGeom>
+          <a:noFill/>
+          <a:ln/>
+        </p:spPr>
+        <p:txBody>
+          <a:bodyPr wrap="square" lIns="0" tIns="0" rIns="0" bIns="0" rtlCol="0" anchor="ctr"/>
+          <a:lstStyle/>
+          <a:p>
+            <a:pPr algn="r" indent="0" marL="0">
+              <a:buNone/>
+            </a:pPr>
+            <a:r>
+              <a:rPr lang="en-US" sz="850" dirty="0">
+                <a:solidFill>
+                  <a:srgbClr val="9AA8B4"/>
+                </a:solidFill>
+                <a:latin typeface="Calibri" pitchFamily="34" charset="0"/>
+                <a:ea typeface="Calibri" pitchFamily="34" charset="-122"/>
+                <a:cs typeface="Calibri" pitchFamily="34" charset="-120"/>
+              </a:rPr>
+              <a:t>CP Lecture Series</a:t>
+            </a:r>
+            <a:pPr algn="r" indent="0" marL="0">
+              <a:buNone/>
+            </a:pPr>
+            <a:r>
+              <a:rPr lang="en-US" sz="850" dirty="0">
+                <a:solidFill>
+                  <a:srgbClr val="DCE4EC"/>
+                </a:solidFill>
+                <a:latin typeface="Calibri" pitchFamily="34" charset="0"/>
+                <a:ea typeface="Calibri" pitchFamily="34" charset="-122"/>
+                <a:cs typeface="Calibri" pitchFamily="34" charset="-120"/>
+              </a:rPr>
+              <a:t>   ·   </a:t>
+            </a:r>
+            <a:pPr algn="r" indent="0" marL="0">
+              <a:buNone/>
+            </a:pPr>
+            <a:r>
+              <a:rPr lang="en-US" sz="850" b="1" dirty="0">
+                <a:solidFill>
+                  <a:srgbClr val="AD1457"/>
+                </a:solidFill>
+                <a:latin typeface="Calibri" pitchFamily="34" charset="0"/>
+                <a:ea typeface="Calibri" pitchFamily="34" charset="-122"/>
+                <a:cs typeface="Calibri" pitchFamily="34" charset="-120"/>
+              </a:rPr>
+              <a:t>27</a:t>
+            </a:r>
+            <a:endParaRPr lang="en-US" sz="850" dirty="0"/>
+          </a:p>
+        </p:txBody>
+      </p:sp>
+    </p:spTree>
+  </p:cSld>
+  <p:clrMapOvr>
+    <a:masterClrMapping/>
+  </p:clrMapOvr>
+</p:sld>
+</file>
+
+<file path=ppt/slides/slide39.xml><?xml version="1.0" encoding="utf-8"?>
+<p:sld xmlns:a="http://schemas.openxmlformats.org/drawingml/2006/main" xmlns:p="http://schemas.openxmlformats.org/presentationml/2006/main" xmlns:r="http://schemas.openxmlformats.org/officeDocument/2006/relationships">
+  <p:cSld>
+    <p:spTree>
+      <p:nvGrpSpPr>
+        <p:cNvPr id="1" name=""/>
+        <p:cNvGrpSpPr/>
+        <p:nvPr/>
+      </p:nvGrpSpPr>
+      <p:grpSpPr/>
+      <p:sp>
+        <p:nvSpPr>
+          <p:cNvPr id="2" name="Text 0"/>
+          <p:cNvSpPr/>
+          <p:nvPr/>
+        </p:nvSpPr>
+        <p:spPr>
+          <a:xfrm>
+            <a:off x="566928" y="329184"/>
+            <a:ext cx="10515600" cy="310896"/>
+          </a:xfrm>
+          <a:prstGeom prst="rect">
+            <a:avLst/>
+          </a:prstGeom>
+          <a:noFill/>
+          <a:ln/>
+        </p:spPr>
+        <p:txBody>
+          <a:bodyPr wrap="square" lIns="0" tIns="0" rIns="0" bIns="0" rtlCol="0" anchor="ctr"/>
+          <a:lstStyle/>
+          <a:p>
+            <a:pPr algn="l" indent="0" marL="0">
+              <a:buNone/>
+            </a:pPr>
+            <a:r>
+              <a:rPr lang="en-US" sz="1100" b="1" spc="150" kern="0" dirty="0">
+                <a:solidFill>
+                  <a:srgbClr val="AD1457"/>
+                </a:solidFill>
+                <a:latin typeface="Calibri" pitchFamily="34" charset="0"/>
+                <a:ea typeface="Calibri" pitchFamily="34" charset="-122"/>
+                <a:cs typeface="Calibri" pitchFamily="34" charset="-120"/>
+              </a:rPr>
+              <a:t>TRANSFUSION MEDICINE   ·   BOARD REVIEW  ·  Q2</a:t>
+            </a:r>
+            <a:endParaRPr lang="en-US" sz="1100" dirty="0"/>
+          </a:p>
+        </p:txBody>
+      </p:sp>
+      <p:sp>
+        <p:nvSpPr>
+          <p:cNvPr id="3" name="Text 1"/>
+          <p:cNvSpPr/>
+          <p:nvPr/>
+        </p:nvSpPr>
+        <p:spPr>
+          <a:xfrm>
+            <a:off x="566928" y="713232"/>
+            <a:ext cx="11064240" cy="749808"/>
+          </a:xfrm>
+          <a:prstGeom prst="rect">
+            <a:avLst/>
+          </a:prstGeom>
+          <a:noFill/>
+          <a:ln/>
+        </p:spPr>
+        <p:txBody>
+          <a:bodyPr wrap="square" lIns="0" tIns="0" rIns="0" bIns="0" rtlCol="0" anchor="ctr"/>
+          <a:lstStyle/>
+          <a:p>
+            <a:pPr algn="l" indent="0" marL="0">
+              <a:buNone/>
+            </a:pPr>
+            <a:r>
+              <a:rPr lang="en-US" sz="2600" b="1" dirty="0">
+                <a:solidFill>
+                  <a:srgbClr val="0E3A5F"/>
+                </a:solidFill>
+                <a:latin typeface="Calibri" pitchFamily="34" charset="0"/>
+                <a:ea typeface="Calibri" pitchFamily="34" charset="-122"/>
+                <a:cs typeface="Calibri" pitchFamily="34" charset="-120"/>
+              </a:rPr>
+              <a:t>Board-Style Review</a:t>
+            </a:r>
+            <a:endParaRPr lang="en-US" sz="2600" dirty="0"/>
+          </a:p>
+        </p:txBody>
+      </p:sp>
+      <p:sp>
+        <p:nvSpPr>
+          <p:cNvPr id="4" name="Text 2"/>
+          <p:cNvSpPr/>
+          <p:nvPr/>
+        </p:nvSpPr>
+        <p:spPr>
+          <a:xfrm>
+            <a:off x="566928" y="1417320"/>
+            <a:ext cx="11057839" cy="914400"/>
+          </a:xfrm>
+          <a:prstGeom prst="rect">
+            <a:avLst/>
+          </a:prstGeom>
+          <a:noFill/>
+          <a:ln/>
+        </p:spPr>
+        <p:txBody>
+          <a:bodyPr wrap="square" lIns="0" tIns="0" rIns="0" bIns="0" rtlCol="0" anchor="t"/>
+          <a:lstStyle/>
+          <a:p>
+            <a:pPr algn="l" indent="0" marL="0">
+              <a:lnSpc>
+                <a:spcPct val="105000"/>
+              </a:lnSpc>
+              <a:buNone/>
+            </a:pPr>
+            <a:r>
+              <a:rPr lang="en-US" sz="1450" b="1" dirty="0">
+                <a:solidFill>
+                  <a:srgbClr val="1B2A38"/>
+                </a:solidFill>
+                <a:latin typeface="Calibri" pitchFamily="34" charset="0"/>
+                <a:ea typeface="Calibri" pitchFamily="34" charset="-122"/>
+                <a:cs typeface="Calibri" pitchFamily="34" charset="-120"/>
+              </a:rPr>
+              <a:t>A patient types as group O on forward typing but is incompatible with all group O donor units and has anti-H. What is the explanation?</a:t>
+            </a:r>
+            <a:endParaRPr lang="en-US" sz="1450" dirty="0"/>
+          </a:p>
+        </p:txBody>
+      </p:sp>
+      <p:sp>
+        <p:nvSpPr>
+          <p:cNvPr id="5" name="Text 3"/>
+          <p:cNvSpPr/>
+          <p:nvPr/>
+        </p:nvSpPr>
+        <p:spPr>
+          <a:xfrm>
+            <a:off x="658368" y="2395728"/>
+            <a:ext cx="6192390" cy="3017520"/>
+          </a:xfrm>
+          <a:prstGeom prst="rect">
+            <a:avLst/>
+          </a:prstGeom>
+          <a:noFill/>
+          <a:ln/>
+        </p:spPr>
+        <p:txBody>
+          <a:bodyPr wrap="square" lIns="0" tIns="0" rIns="0" bIns="0" rtlCol="0" anchor="t"/>
+          <a:lstStyle/>
+          <a:p>
+            <a:pPr algn="l" indent="0" marL="0">
+              <a:spcAft>
+                <a:spcPts val="600"/>
+              </a:spcAft>
+              <a:buNone/>
+            </a:pPr>
+            <a:r>
+              <a:rPr lang="en-US" sz="1350" dirty="0">
+                <a:solidFill>
+                  <a:srgbClr val="33444F"/>
+                </a:solidFill>
+                <a:latin typeface="Calibri" pitchFamily="34" charset="0"/>
+                <a:ea typeface="Calibri" pitchFamily="34" charset="-122"/>
+                <a:cs typeface="Calibri" pitchFamily="34" charset="-120"/>
+              </a:rPr>
+              <a:t>A. Subgroup A2</a:t>
+            </a:r>
+            <a:endParaRPr lang="en-US" sz="1350" dirty="0"/>
+          </a:p>
+          <a:p>
+            <a:pPr algn="l" indent="0" marL="0">
+              <a:spcAft>
+                <a:spcPts val="600"/>
+              </a:spcAft>
+              <a:buNone/>
+            </a:pPr>
+            <a:r>
+              <a:rPr lang="en-US" sz="1350" dirty="0">
+                <a:solidFill>
+                  <a:srgbClr val="33444F"/>
+                </a:solidFill>
+                <a:latin typeface="Calibri" pitchFamily="34" charset="0"/>
+                <a:ea typeface="Calibri" pitchFamily="34" charset="-122"/>
+                <a:cs typeface="Calibri" pitchFamily="34" charset="-120"/>
+              </a:rPr>
+              <a:t>B. Acquired B phenotype</a:t>
+            </a:r>
+            <a:endParaRPr lang="en-US" sz="1350" dirty="0"/>
+          </a:p>
+          <a:p>
+            <a:pPr algn="l" indent="0" marL="0">
+              <a:spcAft>
+                <a:spcPts val="600"/>
+              </a:spcAft>
+              <a:buNone/>
+            </a:pPr>
+            <a:r>
+              <a:rPr lang="en-US" sz="1350" b="1" dirty="0">
+                <a:solidFill>
+                  <a:srgbClr val="7A0E3C"/>
+                </a:solidFill>
+                <a:latin typeface="Calibri" pitchFamily="34" charset="0"/>
+                <a:ea typeface="Calibri" pitchFamily="34" charset="-122"/>
+                <a:cs typeface="Calibri" pitchFamily="34" charset="-120"/>
+              </a:rPr>
+              <a:t>C. Bombay phenotype (Oh)</a:t>
+            </a:r>
+            <a:endParaRPr lang="en-US" sz="1350" dirty="0"/>
+          </a:p>
+          <a:p>
+            <a:pPr algn="l" indent="0" marL="0">
+              <a:spcAft>
+                <a:spcPts val="600"/>
+              </a:spcAft>
+              <a:buNone/>
+            </a:pPr>
+            <a:r>
+              <a:rPr lang="en-US" sz="1350" dirty="0">
+                <a:solidFill>
+                  <a:srgbClr val="33444F"/>
+                </a:solidFill>
+                <a:latin typeface="Calibri" pitchFamily="34" charset="0"/>
+                <a:ea typeface="Calibri" pitchFamily="34" charset="-122"/>
+                <a:cs typeface="Calibri" pitchFamily="34" charset="-120"/>
+              </a:rPr>
+              <a:t>D. Cold autoantibody</a:t>
+            </a:r>
+            <a:endParaRPr lang="en-US" sz="1350" dirty="0"/>
+          </a:p>
+          <a:p>
+            <a:pPr algn="l" indent="0" marL="0">
+              <a:spcAft>
+                <a:spcPts val="600"/>
+              </a:spcAft>
+              <a:buNone/>
+            </a:pPr>
+            <a:r>
+              <a:rPr lang="en-US" sz="1350" dirty="0">
+                <a:solidFill>
+                  <a:srgbClr val="33444F"/>
+                </a:solidFill>
+                <a:latin typeface="Calibri" pitchFamily="34" charset="0"/>
+                <a:ea typeface="Calibri" pitchFamily="34" charset="-122"/>
+                <a:cs typeface="Calibri" pitchFamily="34" charset="-120"/>
+              </a:rPr>
+              <a:t>E. Rouleaux</a:t>
+            </a:r>
+            <a:endParaRPr lang="en-US" sz="1350" dirty="0"/>
+          </a:p>
+        </p:txBody>
+      </p:sp>
+      <p:sp>
+        <p:nvSpPr>
+          <p:cNvPr id="6" name="Shape 4"/>
+          <p:cNvSpPr/>
+          <p:nvPr/>
+        </p:nvSpPr>
+        <p:spPr>
+          <a:xfrm>
+            <a:off x="7201632" y="2395728"/>
+            <a:ext cx="4423136" cy="3246120"/>
+          </a:xfrm>
+          <a:prstGeom prst="roundRect">
+            <a:avLst>
+              <a:gd name="adj" fmla="val 2535"/>
+            </a:avLst>
+          </a:prstGeom>
+          <a:solidFill>
+            <a:srgbClr val="F8E7EF"/>
+          </a:solidFill>
+          <a:ln/>
+          <a:effectLst>
+            <a:outerShdw sx="100000" sy="100000" kx="0" ky="0" algn="bl" rotWithShape="0" blurRad="88900" dist="25400" dir="5400000">
+              <a:srgbClr val="22303C">
+                <a:alpha val="12000"/>
+              </a:srgbClr>
+            </a:outerShdw>
+          </a:effectLst>
+        </p:spPr>
+        <p:txBody>
+          <a:bodyPr/>
+          <a:p/>
+        </p:txBody>
+      </p:sp>
+      <p:sp>
+        <p:nvSpPr>
+          <p:cNvPr id="7" name="Text 5"/>
+          <p:cNvSpPr/>
+          <p:nvPr/>
+        </p:nvSpPr>
+        <p:spPr>
+          <a:xfrm>
+            <a:off x="7439376" y="2578608"/>
+            <a:ext cx="3965936" cy="457200"/>
+          </a:xfrm>
+          <a:prstGeom prst="rect">
+            <a:avLst/>
+          </a:prstGeom>
+          <a:noFill/>
+          <a:ln/>
+        </p:spPr>
+        <p:txBody>
+          <a:bodyPr wrap="square" lIns="0" tIns="0" rIns="0" bIns="0" rtlCol="0" anchor="ctr"/>
+          <a:lstStyle/>
+          <a:p>
+            <a:pPr indent="0" marL="0">
+              <a:buNone/>
+            </a:pPr>
+            <a:r>
+              <a:rPr lang="en-US" sz="1500" b="1" dirty="0">
+                <a:solidFill>
+                  <a:srgbClr val="AD1457"/>
+                </a:solidFill>
+                <a:latin typeface="Calibri" pitchFamily="34" charset="0"/>
+                <a:ea typeface="Calibri" pitchFamily="34" charset="-122"/>
+                <a:cs typeface="Calibri" pitchFamily="34" charset="-120"/>
+              </a:rPr>
+              <a:t>ANSWER  </a:t>
+            </a:r>
+            <a:pPr indent="0" marL="0">
+              <a:buNone/>
+            </a:pPr>
+            <a:r>
+              <a:rPr lang="en-US" sz="1500" b="1" dirty="0">
+                <a:solidFill>
+                  <a:srgbClr val="1B2A38"/>
+                </a:solidFill>
+                <a:latin typeface="Calibri" pitchFamily="34" charset="0"/>
+                <a:ea typeface="Calibri" pitchFamily="34" charset="-122"/>
+                <a:cs typeface="Calibri" pitchFamily="34" charset="-120"/>
+              </a:rPr>
+              <a:t>C — Bombay phenotype (Oh)</a:t>
+            </a:r>
+            <a:endParaRPr lang="en-US" sz="1500" dirty="0"/>
+          </a:p>
+        </p:txBody>
+      </p:sp>
+      <p:sp>
+        <p:nvSpPr>
+          <p:cNvPr id="8" name="Text 6"/>
+          <p:cNvSpPr/>
+          <p:nvPr/>
+        </p:nvSpPr>
+        <p:spPr>
+          <a:xfrm>
+            <a:off x="7439376" y="3127248"/>
+            <a:ext cx="3947648" cy="2377440"/>
+          </a:xfrm>
+          <a:prstGeom prst="rect">
+            <a:avLst/>
+          </a:prstGeom>
+          <a:noFill/>
+          <a:ln/>
+        </p:spPr>
+        <p:txBody>
+          <a:bodyPr wrap="square" lIns="0" tIns="0" rIns="0" bIns="0" rtlCol="0" anchor="t"/>
+          <a:lstStyle/>
+          <a:p>
+            <a:pPr algn="l" indent="0" marL="0">
+              <a:lnSpc>
+                <a:spcPct val="108000"/>
+              </a:lnSpc>
+              <a:buNone/>
+            </a:pPr>
+            <a:r>
+              <a:rPr lang="en-US" sz="1250" dirty="0">
+                <a:solidFill>
+                  <a:srgbClr val="33444F"/>
+                </a:solidFill>
+                <a:latin typeface="Calibri" pitchFamily="34" charset="0"/>
+                <a:ea typeface="Calibri" pitchFamily="34" charset="-122"/>
+                <a:cs typeface="Calibri" pitchFamily="34" charset="-120"/>
+              </a:rPr>
+              <a:t>Bombay individuals lack H antigen (hh) and make potent anti-H, so they appear group O but are incompatible with ordinary O cells and require Bombay units.</a:t>
+            </a:r>
+            <a:endParaRPr lang="en-US" sz="1250" dirty="0"/>
+          </a:p>
+        </p:txBody>
+      </p:sp>
+      <p:sp>
+        <p:nvSpPr>
+          <p:cNvPr id="9" name="Text 7"/>
+          <p:cNvSpPr/>
+          <p:nvPr/>
+        </p:nvSpPr>
+        <p:spPr>
+          <a:xfrm>
+            <a:off x="566928" y="6473952"/>
+            <a:ext cx="7772400" cy="274320"/>
+          </a:xfrm>
+          <a:prstGeom prst="rect">
+            <a:avLst/>
+          </a:prstGeom>
+          <a:noFill/>
+          <a:ln/>
+        </p:spPr>
+        <p:txBody>
+          <a:bodyPr wrap="square" lIns="0" tIns="0" rIns="0" bIns="0" rtlCol="0" anchor="ctr"/>
+          <a:lstStyle/>
+          <a:p>
+            <a:pPr algn="l" indent="0" marL="0">
+              <a:buNone/>
+            </a:pPr>
+            <a:r>
+              <a:rPr lang="en-US" sz="850" dirty="0">
+                <a:solidFill>
+                  <a:srgbClr val="9AA8B4"/>
+                </a:solidFill>
+                <a:latin typeface="Calibri" pitchFamily="34" charset="0"/>
+                <a:ea typeface="Calibri" pitchFamily="34" charset="-122"/>
+                <a:cs typeface="Calibri" pitchFamily="34" charset="-120"/>
+              </a:rPr>
+              <a:t>Makassed General Hospital  ·  Department of Laboratory Medicine</a:t>
+            </a:r>
+            <a:endParaRPr lang="en-US" sz="850" dirty="0"/>
+          </a:p>
+        </p:txBody>
+      </p:sp>
+      <p:sp>
+        <p:nvSpPr>
+          <p:cNvPr id="10" name="Text 8"/>
+          <p:cNvSpPr/>
+          <p:nvPr/>
+        </p:nvSpPr>
+        <p:spPr>
+          <a:xfrm>
+            <a:off x="9814255" y="6473952"/>
+            <a:ext cx="1828800" cy="274320"/>
+          </a:xfrm>
+          <a:prstGeom prst="rect">
+            <a:avLst/>
+          </a:prstGeom>
+          <a:noFill/>
+          <a:ln/>
+        </p:spPr>
+        <p:txBody>
+          <a:bodyPr wrap="square" lIns="0" tIns="0" rIns="0" bIns="0" rtlCol="0" anchor="ctr"/>
+          <a:lstStyle/>
+          <a:p>
+            <a:pPr algn="r" indent="0" marL="0">
+              <a:buNone/>
+            </a:pPr>
+            <a:r>
+              <a:rPr lang="en-US" sz="850" dirty="0">
+                <a:solidFill>
+                  <a:srgbClr val="9AA8B4"/>
+                </a:solidFill>
+                <a:latin typeface="Calibri" pitchFamily="34" charset="0"/>
+                <a:ea typeface="Calibri" pitchFamily="34" charset="-122"/>
+                <a:cs typeface="Calibri" pitchFamily="34" charset="-120"/>
+              </a:rPr>
+              <a:t>CP Lecture Series</a:t>
+            </a:r>
+            <a:pPr algn="r" indent="0" marL="0">
+              <a:buNone/>
+            </a:pPr>
+            <a:r>
+              <a:rPr lang="en-US" sz="850" dirty="0">
+                <a:solidFill>
+                  <a:srgbClr val="DCE4EC"/>
+                </a:solidFill>
+                <a:latin typeface="Calibri" pitchFamily="34" charset="0"/>
+                <a:ea typeface="Calibri" pitchFamily="34" charset="-122"/>
+                <a:cs typeface="Calibri" pitchFamily="34" charset="-120"/>
+              </a:rPr>
+              <a:t>   ·   </a:t>
+            </a:r>
+            <a:pPr algn="r" indent="0" marL="0">
+              <a:buNone/>
+            </a:pPr>
+            <a:r>
+              <a:rPr lang="en-US" sz="850" b="1" dirty="0">
+                <a:solidFill>
+                  <a:srgbClr val="AD1457"/>
+                </a:solidFill>
+                <a:latin typeface="Calibri" pitchFamily="34" charset="0"/>
+                <a:ea typeface="Calibri" pitchFamily="34" charset="-122"/>
+                <a:cs typeface="Calibri" pitchFamily="34" charset="-120"/>
+              </a:rPr>
+              <a:t>26</a:t>
+            </a:r>
+            <a:endParaRPr lang="en-US" sz="850" dirty="0"/>
+          </a:p>
+        </p:txBody>
+      </p:sp>
+    </p:spTree>
+  </p:cSld>
+  <p:clrMapOvr>
+    <a:masterClrMapping/>
+  </p:clrMapOvr>
+</p:sld>
+</file>
+
 <file path=ppt/slides/slide4.xml><?xml version="1.0" encoding="utf-8"?>
 <p:sld xmlns:a="http://schemas.openxmlformats.org/drawingml/2006/main" xmlns:r="http://schemas.openxmlformats.org/officeDocument/2006/relationships" xmlns:p="http://schemas.openxmlformats.org/presentationml/2006/main">
   <p:cSld name="Slide 4">
@@ -19828,6 +21102,10 @@
             </a:outerShdw>
           </a:effectLst>
         </p:spPr>
+        <p:txBody>
+          <a:bodyPr/>
+          <a:p/>
+        </p:txBody>
       </p:sp>
       <p:sp>
         <p:nvSpPr>
@@ -19855,6 +21133,10 @@
             </a:outerShdw>
           </a:effectLst>
         </p:spPr>
+        <p:txBody>
+          <a:bodyPr/>
+          <a:p/>
+        </p:txBody>
       </p:sp>
       <p:sp>
         <p:nvSpPr>
@@ -19969,6 +21251,10 @@
           </a:solidFill>
           <a:ln/>
         </p:spPr>
+        <p:txBody>
+          <a:bodyPr/>
+          <a:p/>
+        </p:txBody>
       </p:sp>
       <p:sp>
         <p:nvSpPr>
@@ -19996,6 +21282,10 @@
             </a:outerShdw>
           </a:effectLst>
         </p:spPr>
+        <p:txBody>
+          <a:bodyPr/>
+          <a:p/>
+        </p:txBody>
       </p:sp>
       <p:sp>
         <p:nvSpPr>
@@ -20117,6 +21407,10 @@
             </a:outerShdw>
           </a:effectLst>
         </p:spPr>
+        <p:txBody>
+          <a:bodyPr/>
+          <a:p/>
+        </p:txBody>
       </p:sp>
       <p:sp>
         <p:nvSpPr>
@@ -20144,6 +21438,10 @@
             </a:outerShdw>
           </a:effectLst>
         </p:spPr>
+        <p:txBody>
+          <a:bodyPr/>
+          <a:p/>
+        </p:txBody>
       </p:sp>
       <p:sp>
         <p:nvSpPr>
@@ -20258,6 +21556,10 @@
           </a:solidFill>
           <a:ln/>
         </p:spPr>
+        <p:txBody>
+          <a:bodyPr/>
+          <a:p/>
+        </p:txBody>
       </p:sp>
       <p:sp>
         <p:nvSpPr>
@@ -20285,6 +21587,10 @@
             </a:outerShdw>
           </a:effectLst>
         </p:spPr>
+        <p:txBody>
+          <a:bodyPr/>
+          <a:p/>
+        </p:txBody>
       </p:sp>
       <p:sp>
         <p:nvSpPr>
@@ -20406,6 +21712,10 @@
             </a:outerShdw>
           </a:effectLst>
         </p:spPr>
+        <p:txBody>
+          <a:bodyPr/>
+          <a:p/>
+        </p:txBody>
       </p:sp>
       <p:sp>
         <p:nvSpPr>
@@ -20433,6 +21743,10 @@
             </a:outerShdw>
           </a:effectLst>
         </p:spPr>
+        <p:txBody>
+          <a:bodyPr/>
+          <a:p/>
+        </p:txBody>
       </p:sp>
       <p:sp>
         <p:nvSpPr>
@@ -20627,6 +21941,500 @@
                 <a:cs typeface="Calibri" pitchFamily="34" charset="-120"/>
               </a:rPr>
               <a:t>4</a:t>
+            </a:r>
+            <a:endParaRPr lang="en-US" sz="850" dirty="0"/>
+          </a:p>
+        </p:txBody>
+      </p:sp>
+    </p:spTree>
+  </p:cSld>
+  <p:clrMapOvr>
+    <a:masterClrMapping/>
+  </p:clrMapOvr>
+</p:sld>
+</file>
+
+<file path=ppt/slides/slide40.xml><?xml version="1.0" encoding="utf-8"?>
+<p:sld xmlns:a="http://schemas.openxmlformats.org/drawingml/2006/main" xmlns:p="http://schemas.openxmlformats.org/presentationml/2006/main" xmlns:r="http://schemas.openxmlformats.org/officeDocument/2006/relationships">
+  <p:cSld>
+    <p:spTree>
+      <p:nvGrpSpPr>
+        <p:cNvPr id="1" name=""/>
+        <p:cNvGrpSpPr/>
+        <p:nvPr/>
+      </p:nvGrpSpPr>
+      <p:grpSpPr/>
+      <p:sp>
+        <p:nvSpPr>
+          <p:cNvPr id="2" name="Text 0"/>
+          <p:cNvSpPr/>
+          <p:nvPr/>
+        </p:nvSpPr>
+        <p:spPr>
+          <a:xfrm>
+            <a:off x="566928" y="329184"/>
+            <a:ext cx="10515600" cy="310896"/>
+          </a:xfrm>
+          <a:prstGeom prst="rect">
+            <a:avLst/>
+          </a:prstGeom>
+          <a:noFill/>
+          <a:ln/>
+        </p:spPr>
+        <p:txBody>
+          <a:bodyPr wrap="square" lIns="0" tIns="0" rIns="0" bIns="0" rtlCol="0" anchor="ctr"/>
+          <a:lstStyle/>
+          <a:p>
+            <a:pPr algn="l" indent="0" marL="0">
+              <a:buNone/>
+            </a:pPr>
+            <a:r>
+              <a:rPr lang="en-US" sz="1100" b="1" spc="150" kern="0" dirty="0">
+                <a:solidFill>
+                  <a:srgbClr val="AD1457"/>
+                </a:solidFill>
+                <a:latin typeface="Calibri" pitchFamily="34" charset="0"/>
+                <a:ea typeface="Calibri" pitchFamily="34" charset="-122"/>
+                <a:cs typeface="Calibri" pitchFamily="34" charset="-120"/>
+              </a:rPr>
+              <a:t>TRANSFUSION MEDICINE   ·   BOARD REVIEW  ·  Q1</a:t>
+            </a:r>
+            <a:endParaRPr lang="en-US" sz="1100" dirty="0"/>
+          </a:p>
+        </p:txBody>
+      </p:sp>
+      <p:sp>
+        <p:nvSpPr>
+          <p:cNvPr id="3" name="Text 1"/>
+          <p:cNvSpPr/>
+          <p:nvPr/>
+        </p:nvSpPr>
+        <p:spPr>
+          <a:xfrm>
+            <a:off x="566928" y="713232"/>
+            <a:ext cx="11064240" cy="749808"/>
+          </a:xfrm>
+          <a:prstGeom prst="rect">
+            <a:avLst/>
+          </a:prstGeom>
+          <a:noFill/>
+          <a:ln/>
+        </p:spPr>
+        <p:txBody>
+          <a:bodyPr wrap="square" lIns="0" tIns="0" rIns="0" bIns="0" rtlCol="0" anchor="ctr"/>
+          <a:lstStyle/>
+          <a:p>
+            <a:pPr algn="l" indent="0" marL="0">
+              <a:buNone/>
+            </a:pPr>
+            <a:r>
+              <a:rPr lang="en-US" sz="2600" b="1" dirty="0">
+                <a:solidFill>
+                  <a:srgbClr val="0E3A5F"/>
+                </a:solidFill>
+                <a:latin typeface="Calibri" pitchFamily="34" charset="0"/>
+                <a:ea typeface="Calibri" pitchFamily="34" charset="-122"/>
+                <a:cs typeface="Calibri" pitchFamily="34" charset="-120"/>
+              </a:rPr>
+              <a:t>Board-Style Review</a:t>
+            </a:r>
+            <a:endParaRPr lang="en-US" sz="2600" dirty="0"/>
+          </a:p>
+        </p:txBody>
+      </p:sp>
+      <p:sp>
+        <p:nvSpPr>
+          <p:cNvPr id="4" name="Text 2"/>
+          <p:cNvSpPr/>
+          <p:nvPr/>
+        </p:nvSpPr>
+        <p:spPr>
+          <a:xfrm>
+            <a:off x="566928" y="1417320"/>
+            <a:ext cx="11057839" cy="914400"/>
+          </a:xfrm>
+          <a:prstGeom prst="rect">
+            <a:avLst/>
+          </a:prstGeom>
+          <a:noFill/>
+          <a:ln/>
+        </p:spPr>
+        <p:txBody>
+          <a:bodyPr wrap="square" lIns="0" tIns="0" rIns="0" bIns="0" rtlCol="0" anchor="t"/>
+          <a:lstStyle/>
+          <a:p>
+            <a:pPr algn="l" indent="0" marL="0">
+              <a:lnSpc>
+                <a:spcPct val="105000"/>
+              </a:lnSpc>
+              <a:buNone/>
+            </a:pPr>
+            <a:r>
+              <a:rPr lang="en-US" sz="1450" b="1" dirty="0">
+                <a:solidFill>
+                  <a:srgbClr val="1B2A38"/>
+                </a:solidFill>
+                <a:latin typeface="Calibri" pitchFamily="34" charset="0"/>
+                <a:ea typeface="Calibri" pitchFamily="34" charset="-122"/>
+                <a:cs typeface="Calibri" pitchFamily="34" charset="-120"/>
+              </a:rPr>
+              <a:t>Why is an ABO-incompatible red cell transfusion capable of causing immediate, severe intravascular hemolysis?</a:t>
+            </a:r>
+            <a:endParaRPr lang="en-US" sz="1450" dirty="0"/>
+          </a:p>
+        </p:txBody>
+      </p:sp>
+      <p:sp>
+        <p:nvSpPr>
+          <p:cNvPr id="5" name="Text 3"/>
+          <p:cNvSpPr/>
+          <p:nvPr/>
+        </p:nvSpPr>
+        <p:spPr>
+          <a:xfrm>
+            <a:off x="658368" y="2395728"/>
+            <a:ext cx="6192390" cy="3017520"/>
+          </a:xfrm>
+          <a:prstGeom prst="rect">
+            <a:avLst/>
+          </a:prstGeom>
+          <a:noFill/>
+          <a:ln/>
+        </p:spPr>
+        <p:txBody>
+          <a:bodyPr wrap="square" lIns="0" tIns="0" rIns="0" bIns="0" rtlCol="0" anchor="t"/>
+          <a:lstStyle/>
+          <a:p>
+            <a:pPr algn="l" indent="0" marL="0">
+              <a:spcAft>
+                <a:spcPts val="600"/>
+              </a:spcAft>
+              <a:buNone/>
+            </a:pPr>
+            <a:r>
+              <a:rPr lang="en-US" sz="1350" dirty="0">
+                <a:solidFill>
+                  <a:srgbClr val="33444F"/>
+                </a:solidFill>
+                <a:latin typeface="Calibri" pitchFamily="34" charset="0"/>
+                <a:ea typeface="Calibri" pitchFamily="34" charset="-122"/>
+                <a:cs typeface="Calibri" pitchFamily="34" charset="-120"/>
+              </a:rPr>
+              <a:t>A. ABO antibodies are IgG and cause extravascular clearance</a:t>
+            </a:r>
+            <a:endParaRPr lang="en-US" sz="1350" dirty="0"/>
+          </a:p>
+          <a:p>
+            <a:pPr algn="l" indent="0" marL="0">
+              <a:spcAft>
+                <a:spcPts val="600"/>
+              </a:spcAft>
+              <a:buNone/>
+            </a:pPr>
+            <a:r>
+              <a:rPr lang="en-US" sz="1350" b="1" dirty="0">
+                <a:solidFill>
+                  <a:srgbClr val="7A0E3C"/>
+                </a:solidFill>
+                <a:latin typeface="Calibri" pitchFamily="34" charset="0"/>
+                <a:ea typeface="Calibri" pitchFamily="34" charset="-122"/>
+                <a:cs typeface="Calibri" pitchFamily="34" charset="-120"/>
+              </a:rPr>
+              <a:t>B. ABO antibodies are naturally occurring IgM that fix complement</a:t>
+            </a:r>
+            <a:endParaRPr lang="en-US" sz="1350" dirty="0"/>
+          </a:p>
+          <a:p>
+            <a:pPr algn="l" indent="0" marL="0">
+              <a:spcAft>
+                <a:spcPts val="600"/>
+              </a:spcAft>
+              <a:buNone/>
+            </a:pPr>
+            <a:r>
+              <a:rPr lang="en-US" sz="1350" dirty="0">
+                <a:solidFill>
+                  <a:srgbClr val="33444F"/>
+                </a:solidFill>
+                <a:latin typeface="Calibri" pitchFamily="34" charset="0"/>
+                <a:ea typeface="Calibri" pitchFamily="34" charset="-122"/>
+                <a:cs typeface="Calibri" pitchFamily="34" charset="-120"/>
+              </a:rPr>
+              <a:t>C. ABO antigens are poorly expressed on red cells</a:t>
+            </a:r>
+            <a:endParaRPr lang="en-US" sz="1350" dirty="0"/>
+          </a:p>
+          <a:p>
+            <a:pPr algn="l" indent="0" marL="0">
+              <a:spcAft>
+                <a:spcPts val="600"/>
+              </a:spcAft>
+              <a:buNone/>
+            </a:pPr>
+            <a:r>
+              <a:rPr lang="en-US" sz="1350" dirty="0">
+                <a:solidFill>
+                  <a:srgbClr val="33444F"/>
+                </a:solidFill>
+                <a:latin typeface="Calibri" pitchFamily="34" charset="0"/>
+                <a:ea typeface="Calibri" pitchFamily="34" charset="-122"/>
+                <a:cs typeface="Calibri" pitchFamily="34" charset="-120"/>
+              </a:rPr>
+              <a:t>D. ABO antibodies require AHG to react</a:t>
+            </a:r>
+            <a:endParaRPr lang="en-US" sz="1350" dirty="0"/>
+          </a:p>
+          <a:p>
+            <a:pPr algn="l" indent="0" marL="0">
+              <a:spcAft>
+                <a:spcPts val="600"/>
+              </a:spcAft>
+              <a:buNone/>
+            </a:pPr>
+            <a:r>
+              <a:rPr lang="en-US" sz="1350" dirty="0">
+                <a:solidFill>
+                  <a:srgbClr val="33444F"/>
+                </a:solidFill>
+                <a:latin typeface="Calibri" pitchFamily="34" charset="0"/>
+                <a:ea typeface="Calibri" pitchFamily="34" charset="-122"/>
+                <a:cs typeface="Calibri" pitchFamily="34" charset="-120"/>
+              </a:rPr>
+              <a:t>E. ABO antibodies only cause delayed reactions</a:t>
+            </a:r>
+            <a:endParaRPr lang="en-US" sz="1350" dirty="0"/>
+          </a:p>
+        </p:txBody>
+      </p:sp>
+      <p:sp>
+        <p:nvSpPr>
+          <p:cNvPr id="6" name="Shape 4"/>
+          <p:cNvSpPr/>
+          <p:nvPr/>
+        </p:nvSpPr>
+        <p:spPr>
+          <a:xfrm>
+            <a:off x="7201632" y="2395728"/>
+            <a:ext cx="4423136" cy="3246120"/>
+          </a:xfrm>
+          <a:prstGeom prst="roundRect">
+            <a:avLst>
+              <a:gd name="adj" fmla="val 2535"/>
+            </a:avLst>
+          </a:prstGeom>
+          <a:solidFill>
+            <a:srgbClr val="F8E7EF"/>
+          </a:solidFill>
+          <a:ln/>
+          <a:effectLst>
+            <a:outerShdw sx="100000" sy="100000" kx="0" ky="0" algn="bl" rotWithShape="0" blurRad="88900" dist="25400" dir="5400000">
+              <a:srgbClr val="22303C">
+                <a:alpha val="12000"/>
+              </a:srgbClr>
+            </a:outerShdw>
+          </a:effectLst>
+        </p:spPr>
+        <p:txBody>
+          <a:bodyPr/>
+          <a:p/>
+        </p:txBody>
+      </p:sp>
+      <p:sp>
+        <p:nvSpPr>
+          <p:cNvPr id="7" name="Text 5"/>
+          <p:cNvSpPr/>
+          <p:nvPr/>
+        </p:nvSpPr>
+        <p:spPr>
+          <a:xfrm>
+            <a:off x="7439376" y="2578608"/>
+            <a:ext cx="3965936" cy="457200"/>
+          </a:xfrm>
+          <a:prstGeom prst="rect">
+            <a:avLst/>
+          </a:prstGeom>
+          <a:noFill/>
+          <a:ln/>
+        </p:spPr>
+        <p:txBody>
+          <a:bodyPr wrap="square" lIns="0" tIns="0" rIns="0" bIns="0" rtlCol="0" anchor="ctr"/>
+          <a:lstStyle/>
+          <a:p>
+            <a:pPr indent="0" marL="0">
+              <a:buNone/>
+            </a:pPr>
+            <a:r>
+              <a:rPr lang="en-US" sz="1500" b="1" dirty="0">
+                <a:solidFill>
+                  <a:srgbClr val="AD1457"/>
+                </a:solidFill>
+                <a:latin typeface="Calibri" pitchFamily="34" charset="0"/>
+                <a:ea typeface="Calibri" pitchFamily="34" charset="-122"/>
+                <a:cs typeface="Calibri" pitchFamily="34" charset="-120"/>
+              </a:rPr>
+              <a:t>ANSWER  </a:t>
+            </a:r>
+            <a:pPr indent="0" marL="0">
+              <a:buNone/>
+            </a:pPr>
+            <a:r>
+              <a:rPr lang="en-US" sz="1500" b="1" dirty="0">
+                <a:solidFill>
+                  <a:srgbClr val="1B2A38"/>
+                </a:solidFill>
+                <a:latin typeface="Calibri" pitchFamily="34" charset="0"/>
+                <a:ea typeface="Calibri" pitchFamily="34" charset="-122"/>
+                <a:cs typeface="Calibri" pitchFamily="34" charset="-120"/>
+              </a:rPr>
+              <a:t>B — Naturally occurring IgM that fix complement</a:t>
+            </a:r>
+            <a:endParaRPr lang="en-US" sz="1500" dirty="0"/>
+          </a:p>
+        </p:txBody>
+      </p:sp>
+      <p:sp>
+        <p:nvSpPr>
+          <p:cNvPr id="8" name="Text 6"/>
+          <p:cNvSpPr/>
+          <p:nvPr/>
+        </p:nvSpPr>
+        <p:spPr>
+          <a:xfrm>
+            <a:off x="7439376" y="3127248"/>
+            <a:ext cx="3947648" cy="2377440"/>
+          </a:xfrm>
+          <a:prstGeom prst="rect">
+            <a:avLst/>
+          </a:prstGeom>
+          <a:noFill/>
+          <a:ln/>
+        </p:spPr>
+        <p:txBody>
+          <a:bodyPr wrap="square" lIns="0" tIns="0" rIns="0" bIns="0" rtlCol="0" anchor="t"/>
+          <a:lstStyle/>
+          <a:p>
+            <a:pPr algn="l" indent="0" marL="0">
+              <a:lnSpc>
+                <a:spcPct val="108000"/>
+              </a:lnSpc>
+              <a:buNone/>
+            </a:pPr>
+            <a:r>
+              <a:rPr lang="en-US" sz="1250" dirty="0">
+                <a:solidFill>
+                  <a:srgbClr val="33444F"/>
+                </a:solidFill>
+                <a:latin typeface="Calibri" pitchFamily="34" charset="0"/>
+                <a:ea typeface="Calibri" pitchFamily="34" charset="-122"/>
+                <a:cs typeface="Calibri" pitchFamily="34" charset="-120"/>
+              </a:rPr>
+              <a:t>ABO antibodies are IgM, present without prior exposure, and activate the full complement cascade — producing acute intravascular hemolysis. This is why ABO identity is the most safety-critical step.</a:t>
+            </a:r>
+            <a:endParaRPr lang="en-US" sz="1250" dirty="0"/>
+          </a:p>
+        </p:txBody>
+      </p:sp>
+      <p:sp>
+        <p:nvSpPr>
+          <p:cNvPr id="9" name="Text 7"/>
+          <p:cNvSpPr/>
+          <p:nvPr/>
+        </p:nvSpPr>
+        <p:spPr>
+          <a:xfrm>
+            <a:off x="566928" y="6473952"/>
+            <a:ext cx="7772400" cy="274320"/>
+          </a:xfrm>
+          <a:prstGeom prst="rect">
+            <a:avLst/>
+          </a:prstGeom>
+          <a:noFill/>
+          <a:ln/>
+        </p:spPr>
+        <p:txBody>
+          <a:bodyPr wrap="square" lIns="0" tIns="0" rIns="0" bIns="0" rtlCol="0" anchor="ctr"/>
+          <a:lstStyle/>
+          <a:p>
+            <a:pPr algn="l" indent="0" marL="0">
+              <a:buNone/>
+            </a:pPr>
+            <a:r>
+              <a:rPr lang="en-US" sz="850" dirty="0">
+                <a:solidFill>
+                  <a:srgbClr val="9AA8B4"/>
+                </a:solidFill>
+                <a:latin typeface="Calibri" pitchFamily="34" charset="0"/>
+                <a:ea typeface="Calibri" pitchFamily="34" charset="-122"/>
+                <a:cs typeface="Calibri" pitchFamily="34" charset="-120"/>
+              </a:rPr>
+              <a:t>Makassed General Hospital  ·  Department of Laboratory Medicine</a:t>
+            </a:r>
+            <a:endParaRPr lang="en-US" sz="850" dirty="0"/>
+          </a:p>
+        </p:txBody>
+      </p:sp>
+      <p:sp>
+        <p:nvSpPr>
+          <p:cNvPr id="10" name="Text 8"/>
+          <p:cNvSpPr/>
+          <p:nvPr/>
+        </p:nvSpPr>
+        <p:spPr>
+          <a:xfrm>
+            <a:off x="9814255" y="6473952"/>
+            <a:ext cx="1828800" cy="274320"/>
+          </a:xfrm>
+          <a:prstGeom prst="rect">
+            <a:avLst/>
+          </a:prstGeom>
+          <a:noFill/>
+          <a:ln/>
+        </p:spPr>
+        <p:txBody>
+          <a:bodyPr wrap="square" lIns="0" tIns="0" rIns="0" bIns="0" rtlCol="0" anchor="ctr"/>
+          <a:lstStyle/>
+          <a:p>
+            <a:pPr algn="r" indent="0" marL="0">
+              <a:buNone/>
+            </a:pPr>
+            <a:r>
+              <a:rPr lang="en-US" sz="850" dirty="0">
+                <a:solidFill>
+                  <a:srgbClr val="9AA8B4"/>
+                </a:solidFill>
+                <a:latin typeface="Calibri" pitchFamily="34" charset="0"/>
+                <a:ea typeface="Calibri" pitchFamily="34" charset="-122"/>
+                <a:cs typeface="Calibri" pitchFamily="34" charset="-120"/>
+              </a:rPr>
+              <a:t>CP Lecture Series</a:t>
+            </a:r>
+            <a:pPr algn="r" indent="0" marL="0">
+              <a:buNone/>
+            </a:pPr>
+            <a:r>
+              <a:rPr lang="en-US" sz="850" dirty="0">
+                <a:solidFill>
+                  <a:srgbClr val="DCE4EC"/>
+                </a:solidFill>
+                <a:latin typeface="Calibri" pitchFamily="34" charset="0"/>
+                <a:ea typeface="Calibri" pitchFamily="34" charset="-122"/>
+                <a:cs typeface="Calibri" pitchFamily="34" charset="-120"/>
+              </a:rPr>
+              <a:t>   ·   </a:t>
+            </a:r>
+            <a:pPr algn="r" indent="0" marL="0">
+              <a:buNone/>
+            </a:pPr>
+            <a:r>
+              <a:rPr lang="en-US" sz="850" b="1" dirty="0">
+                <a:solidFill>
+                  <a:srgbClr val="AD1457"/>
+                </a:solidFill>
+                <a:latin typeface="Calibri" pitchFamily="34" charset="0"/>
+                <a:ea typeface="Calibri" pitchFamily="34" charset="-122"/>
+                <a:cs typeface="Calibri" pitchFamily="34" charset="-120"/>
+              </a:rPr>
+              <a:t>25</a:t>
             </a:r>
             <a:endParaRPr lang="en-US" sz="850" dirty="0"/>
           </a:p>
@@ -20685,6 +22493,10 @@
           </a:solidFill>
           <a:ln/>
         </p:spPr>
+        <p:txBody>
+          <a:bodyPr/>
+          <a:p/>
+        </p:txBody>
       </p:sp>
       <p:sp>
         <p:nvSpPr>
@@ -20707,6 +22519,10 @@
           </a:solidFill>
           <a:ln/>
         </p:spPr>
+        <p:txBody>
+          <a:bodyPr/>
+          <a:p/>
+        </p:txBody>
       </p:sp>
       <p:sp>
         <p:nvSpPr>
@@ -20968,6 +22784,10 @@
             </a:outerShdw>
           </a:effectLst>
         </p:spPr>
+        <p:txBody>
+          <a:bodyPr/>
+          <a:p/>
+        </p:txBody>
       </p:sp>
       <p:pic>
         <p:nvPicPr>
@@ -21276,6 +23096,10 @@
             </a:outerShdw>
           </a:effectLst>
         </p:spPr>
+        <p:txBody>
+          <a:bodyPr/>
+          <a:p/>
+        </p:txBody>
       </p:sp>
       <p:sp>
         <p:nvSpPr>
@@ -21450,6 +23274,10 @@
             </a:outerShdw>
           </a:effectLst>
         </p:spPr>
+        <p:txBody>
+          <a:bodyPr/>
+          <a:p/>
+        </p:txBody>
       </p:sp>
       <p:sp>
         <p:nvSpPr>
@@ -21840,6 +23668,10 @@
             </a:outerShdw>
           </a:effectLst>
         </p:spPr>
+        <p:txBody>
+          <a:bodyPr/>
+          <a:p/>
+        </p:txBody>
       </p:sp>
       <p:sp>
         <p:nvSpPr>
@@ -22014,6 +23846,10 @@
             </a:outerShdw>
           </a:effectLst>
         </p:spPr>
+        <p:txBody>
+          <a:bodyPr/>
+          <a:p/>
+        </p:txBody>
       </p:sp>
       <p:sp>
         <p:nvSpPr>
